--- a/outputs/GPR_FDTD_FWI_SingleRebar_Pipeline.pptx
+++ b/outputs/GPR_FDTD_FWI_SingleRebar_Pipeline.pptx
@@ -6,7 +6,7 @@
   </p:sldMasterIdLst>
   <p:sldIdLst>
     <p:sldId id="256" r:id="rId7"/>
-    <p:sldId id="257" r:id="rId8"/>
+    <p:sldId id="257" r:id="rId9"/>
     <p:sldId id="258" r:id="rId10"/>
     <p:sldId id="259" r:id="rId11"/>
     <p:sldId id="260" r:id="rId12"/>
@@ -514,7 +514,7 @@
           <a:lstStyle/>
           <a:p>
             <a:r>
-              <a:t>The unknowns are intentionally tiny. We're not estimating a full image — we are estimating three numbers from a B-scan. That keeps the inverse problem clean enough to diagnose identifiability.</a:t>
+              <a:t>This deck is about recovering the position, depth, and radius of a single rebar in concrete from a ground-penetrating radar B-scan. Everything is synthetic — observed data and candidate data come from the same wave-equation solver, so any failure we see is in the inverse pipeline, not the physics. The story has three pieces. First, the forward model is a GPU-accelerated 2D finite-difference time-domain solver with absorbing boundaries, batched across scan positions. Second, the inversion is a staged solver — coarse global search, then fine continuous refinement, then a deterministic local grid polish. Third, the result is exact recovery on clean data, and the polished radius stays correct under additive noise up to ten percent. Where the radius starts becoming ambiguous, the pipeline reports a top-k list rather than a single point estimate.</a:t>
             </a:r>
           </a:p>
         </p:txBody>
@@ -584,7 +584,217 @@
           <a:lstStyle/>
           <a:p>
             <a:r>
-              <a:t>This slide is the calibration of where the pipeline starts to lose discrimination. It also justifies why we save top-k candidates and why noisy field data should not use --polish-stop-misfit 0.</a:t>
+              <a:t>These two panels are direct diagnostics of the inversion objective landscape — not optimisation runs, just the objective evaluated on a grid of candidates. The left panel fixes the radius at the true value and sweeps x and z; the dark minimum sits exactly at the true position and the landscape is smoothly convex around it. The right panel fixes x at the true value and sweeps z and radius; here we see the elongated diagonal valley where deeper-and-larger and shallower-and-smaller candidates all fit the data almost equally well. That valley is the geometric origin of the radius bias we have been discussing. The polish stage works because it enumerates discrete cells across this valley rather than following a gradient down it.</a:t>
+            </a:r>
+          </a:p>
+        </p:txBody>
+      </p:sp>
+      <p:sp>
+        <p:nvSpPr>
+          <p:cNvPr id="4" name="Slide Number Placeholder 3"/>
+          <p:cNvSpPr>
+            <a:spLocks noGrp="1"/>
+          </p:cNvSpPr>
+          <p:nvPr>
+            <p:ph type="sldNum" idx="5" sz="quarter"/>
+          </p:nvPr>
+        </p:nvSpPr>
+        <p:spPr/>
+      </p:sp>
+    </p:spTree>
+  </p:cSld>
+  <p:clrMapOvr>
+    <a:masterClrMapping/>
+  </p:clrMapOvr>
+</p:notes>
+</file>
+
+<file path=ppt/notesSlides/notesSlide11.xml><?xml version="1.0" encoding="utf-8"?>
+<p:notes xmlns:a="http://schemas.openxmlformats.org/drawingml/2006/main" xmlns:p="http://schemas.openxmlformats.org/presentationml/2006/main" xmlns:r="http://schemas.openxmlformats.org/officeDocument/2006/relationships">
+  <p:cSld>
+    <p:spTree>
+      <p:nvGrpSpPr>
+        <p:cNvPr id="1" name=""/>
+        <p:cNvGrpSpPr/>
+        <p:nvPr/>
+      </p:nvGrpSpPr>
+      <p:grpSpPr>
+        <a:xfrm>
+          <a:off x="0" y="0"/>
+          <a:ext cx="0" cy="0"/>
+          <a:chOff x="0" y="0"/>
+          <a:chExt cx="0" cy="0"/>
+        </a:xfrm>
+      </p:grpSpPr>
+      <p:sp>
+        <p:nvSpPr>
+          <p:cNvPr id="2" name="Slide Image Placeholder 1"/>
+          <p:cNvSpPr>
+            <a:spLocks noGrp="1"/>
+          </p:cNvSpPr>
+          <p:nvPr>
+            <p:ph type="sldImg" idx="2"/>
+          </p:nvPr>
+        </p:nvSpPr>
+        <p:spPr/>
+      </p:sp>
+      <p:sp>
+        <p:nvSpPr>
+          <p:cNvPr id="3" name="Notes Placeholder 2"/>
+          <p:cNvSpPr>
+            <a:spLocks noGrp="1"/>
+          </p:cNvSpPr>
+          <p:nvPr>
+            <p:ph type="body" idx="3" sz="quarter"/>
+          </p:nvPr>
+        </p:nvSpPr>
+        <p:spPr/>
+        <p:txBody>
+          <a:bodyPr/>
+          <a:lstStyle/>
+          <a:p>
+            <a:r>
+              <a:t>The point of this slide is not that the data misfit is small — under noise the misfit cannot be smaller than the noise floor. The point is that the recovered geometry does not move. Across two noise seeds and four noise levels — exact, one percent, five percent, and ten percent additive trace-RMS noise — the polished radius is exactly 6.0 mm in every case. The data-misfit bars on the right rise linearly with the injected noise level, exactly as they should: the residual is now fully explained by the noise we added, not by a bad model. The model-misfit row stays at zero throughout because the rasterised geometry the polish selects is unchanged. This is what makes the polish stage worth defending under realistic conditions.</a:t>
+            </a:r>
+          </a:p>
+        </p:txBody>
+      </p:sp>
+      <p:sp>
+        <p:nvSpPr>
+          <p:cNvPr id="4" name="Slide Number Placeholder 3"/>
+          <p:cNvSpPr>
+            <a:spLocks noGrp="1"/>
+          </p:cNvSpPr>
+          <p:nvPr>
+            <p:ph type="sldNum" idx="5" sz="quarter"/>
+          </p:nvPr>
+        </p:nvSpPr>
+        <p:spPr/>
+      </p:sp>
+    </p:spTree>
+  </p:cSld>
+  <p:clrMapOvr>
+    <a:masterClrMapping/>
+  </p:clrMapOvr>
+</p:notes>
+</file>
+
+<file path=ppt/notesSlides/notesSlide12.xml><?xml version="1.0" encoding="utf-8"?>
+<p:notes xmlns:a="http://schemas.openxmlformats.org/drawingml/2006/main" xmlns:p="http://schemas.openxmlformats.org/presentationml/2006/main" xmlns:r="http://schemas.openxmlformats.org/officeDocument/2006/relationships">
+  <p:cSld>
+    <p:spTree>
+      <p:nvGrpSpPr>
+        <p:cNvPr id="1" name=""/>
+        <p:cNvGrpSpPr/>
+        <p:nvPr/>
+      </p:nvGrpSpPr>
+      <p:grpSpPr>
+        <a:xfrm>
+          <a:off x="0" y="0"/>
+          <a:ext cx="0" cy="0"/>
+          <a:chOff x="0" y="0"/>
+          <a:chExt cx="0" cy="0"/>
+        </a:xfrm>
+      </p:grpSpPr>
+      <p:sp>
+        <p:nvSpPr>
+          <p:cNvPr id="2" name="Slide Image Placeholder 1"/>
+          <p:cNvSpPr>
+            <a:spLocks noGrp="1"/>
+          </p:cNvSpPr>
+          <p:nvPr>
+            <p:ph type="sldImg" idx="2"/>
+          </p:nvPr>
+        </p:nvSpPr>
+        <p:spPr/>
+      </p:sp>
+      <p:sp>
+        <p:nvSpPr>
+          <p:cNvPr id="3" name="Notes Placeholder 2"/>
+          <p:cNvSpPr>
+            <a:spLocks noGrp="1"/>
+          </p:cNvSpPr>
+          <p:nvPr>
+            <p:ph type="body" idx="3" sz="quarter"/>
+          </p:nvPr>
+        </p:nvSpPr>
+        <p:spPr/>
+        <p:txBody>
+          <a:bodyPr/>
+          <a:lstStyle/>
+          <a:p>
+            <a:r>
+              <a:t>This slide calibrates where the pipeline starts to lose radius discrimination. The eight bars are the top eight polish candidates at ten percent additive noise, sorted by their objective values. The true 6.0 mm radius still wins in two equivalent depth cells, but the margin against the next-distinct radius — 6.2 mm — is only about 5.6e-4. That is a real margin, but it is small enough that beyond this noise level we should not trust a single point estimate. The pipeline's recommended behaviour at this regime is to report the top-k candidates plus the distinct-radius margin and let the user decide how to interpret. It also tells us not to use the zero-misfit early-stop option on noisy data, because the true model cannot reach zero misfit when noise is present.</a:t>
+            </a:r>
+          </a:p>
+        </p:txBody>
+      </p:sp>
+      <p:sp>
+        <p:nvSpPr>
+          <p:cNvPr id="4" name="Slide Number Placeholder 3"/>
+          <p:cNvSpPr>
+            <a:spLocks noGrp="1"/>
+          </p:cNvSpPr>
+          <p:nvPr>
+            <p:ph type="sldNum" idx="5" sz="quarter"/>
+          </p:nvPr>
+        </p:nvSpPr>
+        <p:spPr/>
+      </p:sp>
+    </p:spTree>
+  </p:cSld>
+  <p:clrMapOvr>
+    <a:masterClrMapping/>
+  </p:clrMapOvr>
+</p:notes>
+</file>
+
+<file path=ppt/notesSlides/notesSlide13.xml><?xml version="1.0" encoding="utf-8"?>
+<p:notes xmlns:a="http://schemas.openxmlformats.org/drawingml/2006/main" xmlns:p="http://schemas.openxmlformats.org/presentationml/2006/main" xmlns:r="http://schemas.openxmlformats.org/officeDocument/2006/relationships">
+  <p:cSld>
+    <p:spTree>
+      <p:nvGrpSpPr>
+        <p:cNvPr id="1" name=""/>
+        <p:cNvGrpSpPr/>
+        <p:nvPr/>
+      </p:nvGrpSpPr>
+      <p:grpSpPr>
+        <a:xfrm>
+          <a:off x="0" y="0"/>
+          <a:ext cx="0" cy="0"/>
+          <a:chOff x="0" y="0"/>
+          <a:chExt cx="0" cy="0"/>
+        </a:xfrm>
+      </p:grpSpPr>
+      <p:sp>
+        <p:nvSpPr>
+          <p:cNvPr id="2" name="Slide Image Placeholder 1"/>
+          <p:cNvSpPr>
+            <a:spLocks noGrp="1"/>
+          </p:cNvSpPr>
+          <p:nvPr>
+            <p:ph type="sldImg" idx="2"/>
+          </p:nvPr>
+        </p:nvSpPr>
+        <p:spPr/>
+      </p:sp>
+      <p:sp>
+        <p:nvSpPr>
+          <p:cNvPr id="3" name="Notes Placeholder 2"/>
+          <p:cNvSpPr>
+            <a:spLocks noGrp="1"/>
+          </p:cNvSpPr>
+          <p:nvPr>
+            <p:ph type="body" idx="3" sz="quarter"/>
+          </p:nvPr>
+        </p:nvSpPr>
+        <p:spPr/>
+        <p:txBody>
+          <a:bodyPr/>
+          <a:lstStyle/>
+          <a:p>
+            <a:r>
+              <a:t>The three forward directions all lift one assumption of the current twin experiment. Multi-rebar re-introduces two or three rebars; the polish stage and identifiability hierarchy carry over, but the global search stage gets harder because the basin landscape becomes multi-modal. Nuisance parameters means letting concrete permittivity, conductivity, time-zero, and source wavelet float — this is the realism gap that shows up in the FWI literature, and radius identifiability depends on calibrating it. Field-style validation adds a hyperbola-fitting and migration baseline so we can quantify what full-waveform inversion buys over simpler methods, and lets us cross-check the forward model against an independent solver. The pipeline pieces that transfer directly are the forward model, the numbered-run convention, and the grid-polish stage. The new work is in the search strategy and in mapping which parameters the observed data actually constrains.</a:t>
             </a:r>
           </a:p>
         </p:txBody>
@@ -654,7 +864,7 @@
           <a:lstStyle/>
           <a:p>
             <a:r>
-              <a:t>Stage 1 finds the basin globally on a cheap grid. Stage 2 refines continuously on the production grid. Stage 3 is deterministic and small, and is the part that actually closes the radius gap by accepting that the geometry is rasterized.</a:t>
+              <a:t>The unknowns are intentionally tiny. We are not estimating a full subsurface image — only three numbers from a B-scan: lateral position, depth, and radius of one circular rebar. That keeps the inverse problem clean enough to diagnose identifiability. The twin-experiment design — observed and candidate B-scans come from the same forward operator — means any wrong answer must come from the inverse pipeline. The identifiability hierarchy on the left is consistent with the GPR-FWI literature: lateral position is set by the hyperbola apex, depth is set by the moveout once velocity is known, and radius is the weakly identified quantity that couples to nuisance parameters and to the grid. The true model on the right is what the observed B-scan is synthesised from; the initial guess is deliberately offset so the optimiser has real work to do.</a:t>
             </a:r>
           </a:p>
         </p:txBody>
@@ -724,7 +934,7 @@
           <a:lstStyle/>
           <a:p>
             <a:r>
-              <a:t>The forward model is the same one used in the previous geometry-inversion runs. The presentation point is that the GPU batched solver makes one objective evaluation as cheap as a single FDTD run for moderate scan counts.</a:t>
+              <a:t>The same forward model sits at the top, used by all three stages — what changes from stage to stage is the search strategy and the grid resolution. Stage one is a coarse global search on a 2 mm grid using differential evolution. Its job is to find the right basin in (x, z, r); it does not need to be accurate. Stage two takes that seed and runs a fine continuous local search on the production 1 mm grid using SciPy's derivative-free Powell optimiser. It locks in lateral position and depth, but it consistently biases the radius slightly high because of a depth–radius coupling we will see in a moment. Stage three is a deterministic small grid search over depth and radius on the 1 mm grid. It is the step that closes the radius gap by accepting that the rasterised geometry is piecewise constant in physical coordinates.</a:t>
             </a:r>
           </a:p>
         </p:txBody>
@@ -794,7 +1004,7 @@
           <a:lstStyle/>
           <a:p>
             <a:r>
-              <a:t>Both axes are log-J. On the 2 mm grid the optimizer literally cannot distinguish r=4.5, 5.0, 5.5 because the cell mask is identical. On the 1 mm grid we recover a V-shape with the true radius at the bottom.</a:t>
+              <a:t>The forward model is a 2D transverse-magnetic finite-difference time-domain solver on a Yee staggered grid, with convolutional perfectly matched layer boundaries to absorb outgoing waves. It runs on the GPU through CuPy. The important property for inversion runtime is that the batched B-scan path advances every scan position in one GPU launch, so a single objective evaluation costs roughly the same as a single forward solve. Every change to the solver is parity-tested against the CPU reference for both the single-trace and the batched paths, so GPU regressions are caught early. Every inversion or diagnostic run writes a manifest with the exact command, git commit, backend, and summary path, so the experiment log is reproducible. On the right is one observed B-scan with five scan positions; the rebar hyperbola sits near 2 nanoseconds.</a:t>
             </a:r>
           </a:p>
         </p:txBody>
@@ -864,7 +1074,7 @@
           <a:lstStyle/>
           <a:p>
             <a:r>
-              <a:t>This is the central technical insight. Radius bias is not 'optimizer failure', it is a real coupling between depth and radius in the waveform objective near the minimum. The remedy is the grid polish in stage 3.</a:t>
+              <a:t>Both panels show the inversion objective as a function of radius, on a log scale. The only thing that changes between the left and right panels is the grid step of the forward model. On the 2 mm grid, the radius values 4.5, 5.0, and 5.5 all sit on a flat plateau because the circular rebar rasterises to the same set of cells for all three — the optimiser literally cannot distinguish them. The 1 mm grid breaks those plateaus and gives us a clean V-shape with the true 6.0 mm radius at the bottom. The implication is important: radius identifiability in this code is dominated by geometry discretisation. We tried multi-frequency stacking first; it did not fix the plateau. A finer grid did. That is why the production pipeline runs at 1 mm even though the seed stage uses 2 mm for speed.</a:t>
             </a:r>
           </a:p>
         </p:txBody>
@@ -934,7 +1144,7 @@
           <a:lstStyle/>
           <a:p>
             <a:r>
-              <a:t>Polish is the single most important step for radius in this pipeline. The 0.25 mm z difference is a hard-grid equivalence — multiple sub-mm z values produce the same rasterized circle.</a:t>
+              <a:t>This is the central technical insight of the deck. The continuous Powell optimiser stops at radius about 6.8 mm and depth about 0.65 mm deeper than truth, with a small but non-zero misfit. When we fix x and z and profile radius alone, the right answer is 6.0 mm exactly. When we fix x and the wrong depth and profile radius, we get the same 6.8 mm Powell found. So a deeper rebar trades against a larger radius and produces a near-identical waveform — the objective near the optimum is an elongated valley, not a clean basin. Adding more scan positions narrows the valley but does not move its radius minimum, because the trade-off is intrinsic to the physics at the wavelengths we are using. The remedy cannot come from more data; it has to come from the search strategy. That is what motivates stage 3.</a:t>
             </a:r>
           </a:p>
         </p:txBody>
@@ -1004,7 +1214,7 @@
           <a:lstStyle/>
           <a:p>
             <a:r>
-              <a:t>z reads 89.75 because the 1 mm hard-grid circle is identical at z=89.75 and z=90.0 — both produce the same material mask and the same B-scan. That is a representation detail, not a science result.</a:t>
+              <a:t>The grid polish is the single most important step for radius in this pipeline. It is conceptually simple: take Powell's approximate answer, build a small list of nearby (depth, radius) candidates on an absolute millimetre grid, run the forward solver on each, and pick the best. The default is a 40-candidate coarse grid with depth step 0.5 mm and radius step 0.2 mm; an 160-candidate fine preset exists for audit runs. The polish also keeps the top few candidates, not just the winner, so the margin between the chosen geometry and its closest competitor is auditable. On the right, Powell hands off radius 6.96 mm with a small but non-zero misfit. After polish, we land at radius 6.00 mm with misfit zero. The depth reads 89.75 mm rather than 90.00 mm because at this 1 mm grid resolution the rasterised circle is identical for several sub-millimetre depth values — that is a representation detail, not a result detail.</a:t>
             </a:r>
           </a:p>
         </p:txBody>
@@ -1074,7 +1284,7 @@
           <a:lstStyle/>
           <a:p>
             <a:r>
-              <a:t>Both panels show the same direct-wave band and rebar diffraction. Zero misfit is the strongest possible synthetic-recovery signal.</a:t>
+              <a:t>This is the exact-synthetic final result. The three model panels are the initial guess on the left, the recovered model in the middle, and the ground truth on the right. The rebar appears as a small high-permittivity inclusion in the concrete; the recovered and ground-truth panels are visually identical because, on the 1 mm grid, they are the same model. The metric tiles below confirm: lateral position 250 mm exactly, depth 89.75 mm (which is the same rasterised cell as 90 mm), radius 6.0 mm exactly, normalised root mean square misfit zero for both the model and the data. The depth reads 89.75 rather than 90.00 because at 1 mm grid resolution several sub-millimetre depth values produce the same rasterised circle. That is a representation detail, not a science result.</a:t>
             </a:r>
           </a:p>
         </p:txBody>
@@ -1144,7 +1354,7 @@
           <a:lstStyle/>
           <a:p>
             <a:r>
-              <a:t>The point isn't that the misfit is small; it is that the recovered geometry doesn't move. The data residual is fully explained by the noise we added.</a:t>
+              <a:t>These are the two B-scans side by side: observed on the left, recovered from the inverted geometry on the right. Both show the same direct-wave band at the top, the same rebar diffraction hyperbola near 2 nanoseconds, and the same trailing reverberations. The two panels are not just visually similar — the trace-by-trace difference is below the floating-point floor, so the normalised data misfit is exactly zero. This is the strongest possible synthetic recovery signal: on the 1 mm grid, the recovered model is the same model as the truth, not just a close fit. The value of showing both panels is mostly to make the zero-misfit statement visible to the audience.</a:t>
             </a:r>
           </a:p>
         </p:txBody>
@@ -7121,7 +7331,7 @@
         <p:spPr>
           <a:xfrm>
             <a:off x="365760" y="1280160"/>
-            <a:ext cx="11430000" cy="3947979"/>
+            <a:ext cx="11430000" cy="4126016"/>
           </a:xfrm>
           <a:prstGeom prst="rect">
             <a:avLst/>

--- a/outputs/GPR_FDTD_FWI_SingleRebar_Pipeline.pptx
+++ b/outputs/GPR_FDTD_FWI_SingleRebar_Pipeline.pptx
@@ -4,22 +4,25 @@
   <p:sldMasterIdLst>
     <p:sldMasterId id="2147483648" r:id="rId1"/>
   </p:sldMasterIdLst>
+  <p:notesMasterIdLst>
+    <p:notesMasterId r:id="rId15"/>
+  </p:notesMasterIdLst>
   <p:sldIdLst>
-    <p:sldId id="256" r:id="rId7"/>
-    <p:sldId id="257" r:id="rId9"/>
-    <p:sldId id="258" r:id="rId10"/>
-    <p:sldId id="259" r:id="rId11"/>
-    <p:sldId id="260" r:id="rId12"/>
-    <p:sldId id="261" r:id="rId13"/>
-    <p:sldId id="262" r:id="rId14"/>
-    <p:sldId id="263" r:id="rId15"/>
-    <p:sldId id="264" r:id="rId16"/>
-    <p:sldId id="265" r:id="rId17"/>
-    <p:sldId id="266" r:id="rId18"/>
-    <p:sldId id="267" r:id="rId19"/>
-    <p:sldId id="268" r:id="rId20"/>
+    <p:sldId id="256" r:id="rId2"/>
+    <p:sldId id="257" r:id="rId3"/>
+    <p:sldId id="258" r:id="rId4"/>
+    <p:sldId id="259" r:id="rId5"/>
+    <p:sldId id="260" r:id="rId6"/>
+    <p:sldId id="261" r:id="rId7"/>
+    <p:sldId id="262" r:id="rId8"/>
+    <p:sldId id="263" r:id="rId9"/>
+    <p:sldId id="264" r:id="rId10"/>
+    <p:sldId id="265" r:id="rId11"/>
+    <p:sldId id="266" r:id="rId12"/>
+    <p:sldId id="267" r:id="rId13"/>
+    <p:sldId id="268" r:id="rId14"/>
   </p:sldIdLst>
-  <p:sldSz cx="12191695" cy="6858000" type="screen4x3"/>
+  <p:sldSz cx="12192000" cy="6858000"/>
   <p:notesSz cx="6858000" cy="9144000"/>
   <p:defaultTextStyle>
     <a:defPPr>
@@ -116,11 +119,27 @@
       </a:defRPr>
     </a:lvl9pPr>
   </p:defaultTextStyle>
+  <p:extLst>
+    <p:ext uri="{EFAFB233-063F-42B5-8137-9DF3F51BA10A}">
+      <p15:sldGuideLst xmlns:p15="http://schemas.microsoft.com/office/powerpoint/2012/main">
+        <p15:guide id="1" orient="horz" pos="2160">
+          <p15:clr>
+            <a:srgbClr val="A4A3A4"/>
+          </p15:clr>
+        </p15:guide>
+        <p15:guide id="2" pos="2880">
+          <p15:clr>
+            <a:srgbClr val="A4A3A4"/>
+          </p15:clr>
+        </p15:guide>
+      </p15:sldGuideLst>
+    </p:ext>
+  </p:extLst>
 </p:presentation>
 </file>
 
 <file path=ppt/notesMasters/notesMaster1.xml><?xml version="1.0" encoding="utf-8"?>
-<p:notesMaster xmlns:a="http://schemas.openxmlformats.org/drawingml/2006/main" xmlns:p="http://schemas.openxmlformats.org/presentationml/2006/main" xmlns:r="http://schemas.openxmlformats.org/officeDocument/2006/relationships">
+<p:notesMaster xmlns:a="http://schemas.openxmlformats.org/drawingml/2006/main" xmlns:r="http://schemas.openxmlformats.org/officeDocument/2006/relationships" xmlns:p="http://schemas.openxmlformats.org/presentationml/2006/main">
   <p:cSld>
     <p:bg>
       <p:bgRef idx="1001">
@@ -141,241 +160,16 @@
           <a:chExt cx="0" cy="0"/>
         </a:xfrm>
       </p:grpSpPr>
-      <p:sp>
-        <p:nvSpPr>
-          <p:cNvPr id="2" name="Header Placeholder 1"/>
-          <p:cNvSpPr>
-            <a:spLocks noGrp="1"/>
-          </p:cNvSpPr>
-          <p:nvPr>
-            <p:ph type="hdr" sz="quarter"/>
-          </p:nvPr>
-        </p:nvSpPr>
-        <p:spPr>
-          <a:xfrm>
-            <a:off x="0" y="0"/>
-            <a:ext cx="2971800" cy="457200"/>
-          </a:xfrm>
-          <a:prstGeom prst="rect">
-            <a:avLst/>
-          </a:prstGeom>
-        </p:spPr>
-        <p:txBody>
-          <a:bodyPr vert="horz" lIns="91440" tIns="45720" rIns="91440" bIns="45720" rtlCol="0"/>
-          <a:lstStyle>
-            <a:lvl1pPr algn="l">
-              <a:defRPr sz="1200"/>
-            </a:lvl1pPr>
-          </a:lstStyle>
-          <a:p>
-            <a:endParaRPr lang="en-US"/>
-          </a:p>
-        </p:txBody>
-      </p:sp>
-      <p:sp>
-        <p:nvSpPr>
-          <p:cNvPr id="3" name="Date Placeholder 2"/>
-          <p:cNvSpPr>
-            <a:spLocks noGrp="1"/>
-          </p:cNvSpPr>
-          <p:nvPr>
-            <p:ph type="dt" idx="1"/>
-          </p:nvPr>
-        </p:nvSpPr>
-        <p:spPr>
-          <a:xfrm>
-            <a:off x="3884613" y="0"/>
-            <a:ext cx="2971800" cy="457200"/>
-          </a:xfrm>
-          <a:prstGeom prst="rect">
-            <a:avLst/>
-          </a:prstGeom>
-        </p:spPr>
-        <p:txBody>
-          <a:bodyPr vert="horz" lIns="91440" tIns="45720" rIns="91440" bIns="45720" rtlCol="0"/>
-          <a:lstStyle>
-            <a:lvl1pPr algn="r">
-              <a:defRPr sz="1200"/>
-            </a:lvl1pPr>
-          </a:lstStyle>
-          <a:p>
-            <a:fld id="{0F89C1C7-3DCD-1040-A9CF-14679D8B5DDD}" type="datetimeFigureOut">
-              <a:rPr lang="en-US" smtClean="0"/>
-              <a:t>10/17/16</a:t>
-            </a:fld>
-            <a:endParaRPr lang="en-US"/>
-          </a:p>
-        </p:txBody>
-      </p:sp>
-      <p:sp>
-        <p:nvSpPr>
-          <p:cNvPr id="4" name="Slide Image Placeholder 3"/>
-          <p:cNvSpPr>
-            <a:spLocks noGrp="1" noRot="1" noChangeAspect="1"/>
-          </p:cNvSpPr>
-          <p:nvPr>
-            <p:ph type="sldImg" idx="2"/>
-          </p:nvPr>
-        </p:nvSpPr>
-        <p:spPr>
-          <a:xfrm>
-            <a:off x="1143000" y="685800"/>
-            <a:ext cx="4572000" cy="3429000"/>
-          </a:xfrm>
-          <a:prstGeom prst="rect">
-            <a:avLst/>
-          </a:prstGeom>
-          <a:noFill/>
-          <a:ln w="12700">
-            <a:solidFill>
-              <a:prstClr val="black"/>
-            </a:solidFill>
-          </a:ln>
-        </p:spPr>
-        <p:txBody>
-          <a:bodyPr vert="horz" lIns="91440" tIns="45720" rIns="91440" bIns="45720" rtlCol="0" anchor="ctr"/>
-          <a:lstStyle/>
-          <a:p>
-            <a:endParaRPr lang="en-US"/>
-          </a:p>
-        </p:txBody>
-      </p:sp>
-      <p:sp>
-        <p:nvSpPr>
-          <p:cNvPr id="5" name="Notes Placeholder 4"/>
-          <p:cNvSpPr>
-            <a:spLocks noGrp="1"/>
-          </p:cNvSpPr>
-          <p:nvPr>
-            <p:ph type="body" sz="quarter" idx="3"/>
-          </p:nvPr>
-        </p:nvSpPr>
-        <p:spPr>
-          <a:xfrm>
-            <a:off x="685800" y="4343400"/>
-            <a:ext cx="5486400" cy="4114800"/>
-          </a:xfrm>
-          <a:prstGeom prst="rect">
-            <a:avLst/>
-          </a:prstGeom>
-        </p:spPr>
-        <p:txBody>
-          <a:bodyPr vert="horz" lIns="91440" tIns="45720" rIns="91440" bIns="45720" rtlCol="0"/>
-          <a:lstStyle/>
-          <a:p>
-            <a:pPr lvl="0"/>
-            <a:r>
-              <a:rPr lang="en-US" smtClean="0"/>
-              <a:t>Click to edit Master text styles</a:t>
-            </a:r>
-          </a:p>
-          <a:p>
-            <a:pPr lvl="1"/>
-            <a:r>
-              <a:rPr lang="en-US" smtClean="0"/>
-              <a:t>Second level</a:t>
-            </a:r>
-          </a:p>
-          <a:p>
-            <a:pPr lvl="2"/>
-            <a:r>
-              <a:rPr lang="en-US" smtClean="0"/>
-              <a:t>Third level</a:t>
-            </a:r>
-          </a:p>
-          <a:p>
-            <a:pPr lvl="3"/>
-            <a:r>
-              <a:rPr lang="en-US" smtClean="0"/>
-              <a:t>Fourth level</a:t>
-            </a:r>
-          </a:p>
-          <a:p>
-            <a:pPr lvl="4"/>
-            <a:r>
-              <a:rPr lang="en-US" smtClean="0"/>
-              <a:t>Fifth level</a:t>
-            </a:r>
-            <a:endParaRPr lang="en-US"/>
-          </a:p>
-        </p:txBody>
-      </p:sp>
-      <p:sp>
-        <p:nvSpPr>
-          <p:cNvPr id="6" name="Footer Placeholder 5"/>
-          <p:cNvSpPr>
-            <a:spLocks noGrp="1"/>
-          </p:cNvSpPr>
-          <p:nvPr>
-            <p:ph type="ftr" sz="quarter" idx="4"/>
-          </p:nvPr>
-        </p:nvSpPr>
-        <p:spPr>
-          <a:xfrm>
-            <a:off x="0" y="8685213"/>
-            <a:ext cx="2971800" cy="457200"/>
-          </a:xfrm>
-          <a:prstGeom prst="rect">
-            <a:avLst/>
-          </a:prstGeom>
-        </p:spPr>
-        <p:txBody>
-          <a:bodyPr vert="horz" lIns="91440" tIns="45720" rIns="91440" bIns="45720" rtlCol="0" anchor="b"/>
-          <a:lstStyle>
-            <a:lvl1pPr algn="l">
-              <a:defRPr sz="1200"/>
-            </a:lvl1pPr>
-          </a:lstStyle>
-          <a:p>
-            <a:endParaRPr lang="en-US"/>
-          </a:p>
-        </p:txBody>
-      </p:sp>
-      <p:sp>
-        <p:nvSpPr>
-          <p:cNvPr id="7" name="Slide Number Placeholder 6"/>
-          <p:cNvSpPr>
-            <a:spLocks noGrp="1"/>
-          </p:cNvSpPr>
-          <p:nvPr>
-            <p:ph type="sldNum" sz="quarter" idx="5"/>
-          </p:nvPr>
-        </p:nvSpPr>
-        <p:spPr>
-          <a:xfrm>
-            <a:off x="3884613" y="8685213"/>
-            <a:ext cx="2971800" cy="457200"/>
-          </a:xfrm>
-          <a:prstGeom prst="rect">
-            <a:avLst/>
-          </a:prstGeom>
-        </p:spPr>
-        <p:txBody>
-          <a:bodyPr vert="horz" lIns="91440" tIns="45720" rIns="91440" bIns="45720" rtlCol="0" anchor="b"/>
-          <a:lstStyle>
-            <a:lvl1pPr algn="r">
-              <a:defRPr sz="1200"/>
-            </a:lvl1pPr>
-          </a:lstStyle>
-          <a:p>
-            <a:fld id="{BB5E49A5-4136-284D-997B-48E1D791AD67}" type="slidenum">
-              <a:rPr lang="en-US" smtClean="0"/>
-              <a:t>‹#›</a:t>
-            </a:fld>
-            <a:endParaRPr lang="en-US"/>
-          </a:p>
-        </p:txBody>
-      </p:sp>
     </p:spTree>
     <p:extLst>
       <p:ext uri="{BB962C8B-B14F-4D97-AF65-F5344CB8AC3E}">
-        <p14:creationId xmlns:p14="http://schemas.microsoft.com/office/powerpoint/2010/main" val="2623252185"/>
+        <p14:creationId xmlns:p14="http://schemas.microsoft.com/office/powerpoint/2010/main" val="2864029498"/>
       </p:ext>
     </p:extLst>
   </p:cSld>
   <p:clrMap bg1="lt1" tx1="dk1" bg2="lt2" tx2="dk2" accent1="accent1" accent2="accent2" accent3="accent3" accent4="accent4" accent5="accent5" accent6="accent6" hlink="hlink" folHlink="folHlink"/>
   <p:notesStyle>
-    <a:lvl1pPr marL="0" algn="l" defTabSz="457200" rtl="0" eaLnBrk="1" latinLnBrk="0" hangingPunct="1">
+    <a:lvl1pPr marL="0" algn="l" defTabSz="914400" rtl="0" eaLnBrk="1" latinLnBrk="0" hangingPunct="1">
       <a:defRPr sz="1200" kern="1200">
         <a:solidFill>
           <a:schemeClr val="tx1"/>
@@ -385,7 +179,7 @@
         <a:cs typeface="+mn-cs"/>
       </a:defRPr>
     </a:lvl1pPr>
-    <a:lvl2pPr marL="457200" algn="l" defTabSz="457200" rtl="0" eaLnBrk="1" latinLnBrk="0" hangingPunct="1">
+    <a:lvl2pPr marL="457200" algn="l" defTabSz="914400" rtl="0" eaLnBrk="1" latinLnBrk="0" hangingPunct="1">
       <a:defRPr sz="1200" kern="1200">
         <a:solidFill>
           <a:schemeClr val="tx1"/>
@@ -395,7 +189,7 @@
         <a:cs typeface="+mn-cs"/>
       </a:defRPr>
     </a:lvl2pPr>
-    <a:lvl3pPr marL="914400" algn="l" defTabSz="457200" rtl="0" eaLnBrk="1" latinLnBrk="0" hangingPunct="1">
+    <a:lvl3pPr marL="914400" algn="l" defTabSz="914400" rtl="0" eaLnBrk="1" latinLnBrk="0" hangingPunct="1">
       <a:defRPr sz="1200" kern="1200">
         <a:solidFill>
           <a:schemeClr val="tx1"/>
@@ -405,7 +199,7 @@
         <a:cs typeface="+mn-cs"/>
       </a:defRPr>
     </a:lvl3pPr>
-    <a:lvl4pPr marL="1371600" algn="l" defTabSz="457200" rtl="0" eaLnBrk="1" latinLnBrk="0" hangingPunct="1">
+    <a:lvl4pPr marL="1371600" algn="l" defTabSz="914400" rtl="0" eaLnBrk="1" latinLnBrk="0" hangingPunct="1">
       <a:defRPr sz="1200" kern="1200">
         <a:solidFill>
           <a:schemeClr val="tx1"/>
@@ -415,7 +209,7 @@
         <a:cs typeface="+mn-cs"/>
       </a:defRPr>
     </a:lvl4pPr>
-    <a:lvl5pPr marL="1828800" algn="l" defTabSz="457200" rtl="0" eaLnBrk="1" latinLnBrk="0" hangingPunct="1">
+    <a:lvl5pPr marL="1828800" algn="l" defTabSz="914400" rtl="0" eaLnBrk="1" latinLnBrk="0" hangingPunct="1">
       <a:defRPr sz="1200" kern="1200">
         <a:solidFill>
           <a:schemeClr val="tx1"/>
@@ -425,7 +219,7 @@
         <a:cs typeface="+mn-cs"/>
       </a:defRPr>
     </a:lvl5pPr>
-    <a:lvl6pPr marL="2286000" algn="l" defTabSz="457200" rtl="0" eaLnBrk="1" latinLnBrk="0" hangingPunct="1">
+    <a:lvl6pPr marL="2286000" algn="l" defTabSz="914400" rtl="0" eaLnBrk="1" latinLnBrk="0" hangingPunct="1">
       <a:defRPr sz="1200" kern="1200">
         <a:solidFill>
           <a:schemeClr val="tx1"/>
@@ -435,7 +229,7 @@
         <a:cs typeface="+mn-cs"/>
       </a:defRPr>
     </a:lvl6pPr>
-    <a:lvl7pPr marL="2743200" algn="l" defTabSz="457200" rtl="0" eaLnBrk="1" latinLnBrk="0" hangingPunct="1">
+    <a:lvl7pPr marL="2743200" algn="l" defTabSz="914400" rtl="0" eaLnBrk="1" latinLnBrk="0" hangingPunct="1">
       <a:defRPr sz="1200" kern="1200">
         <a:solidFill>
           <a:schemeClr val="tx1"/>
@@ -445,7 +239,7 @@
         <a:cs typeface="+mn-cs"/>
       </a:defRPr>
     </a:lvl7pPr>
-    <a:lvl8pPr marL="3200400" algn="l" defTabSz="457200" rtl="0" eaLnBrk="1" latinLnBrk="0" hangingPunct="1">
+    <a:lvl8pPr marL="3200400" algn="l" defTabSz="914400" rtl="0" eaLnBrk="1" latinLnBrk="0" hangingPunct="1">
       <a:defRPr sz="1200" kern="1200">
         <a:solidFill>
           <a:schemeClr val="tx1"/>
@@ -455,7 +249,7 @@
         <a:cs typeface="+mn-cs"/>
       </a:defRPr>
     </a:lvl8pPr>
-    <a:lvl9pPr marL="3657600" algn="l" defTabSz="457200" rtl="0" eaLnBrk="1" latinLnBrk="0" hangingPunct="1">
+    <a:lvl9pPr marL="3657600" algn="l" defTabSz="914400" rtl="0" eaLnBrk="1" latinLnBrk="0" hangingPunct="1">
       <a:defRPr sz="1200" kern="1200">
         <a:solidFill>
           <a:schemeClr val="tx1"/>
@@ -470,7 +264,7 @@
 </file>
 
 <file path=ppt/notesSlides/notesSlide1.xml><?xml version="1.0" encoding="utf-8"?>
-<p:notes xmlns:a="http://schemas.openxmlformats.org/drawingml/2006/main" xmlns:p="http://schemas.openxmlformats.org/presentationml/2006/main" xmlns:r="http://schemas.openxmlformats.org/officeDocument/2006/relationships">
+<p:notes xmlns:a="http://schemas.openxmlformats.org/drawingml/2006/main" xmlns:r="http://schemas.openxmlformats.org/officeDocument/2006/relationships" xmlns:p="http://schemas.openxmlformats.org/presentationml/2006/main">
   <p:cSld>
     <p:spTree>
       <p:nvGrpSpPr>
@@ -490,7 +284,7 @@
         <p:nvSpPr>
           <p:cNvPr id="2" name="Slide Image Placeholder 1"/>
           <p:cNvSpPr>
-            <a:spLocks noGrp="1"/>
+            <a:spLocks noGrp="1" noRot="1" noChangeAspect="1"/>
           </p:cNvSpPr>
           <p:nvPr>
             <p:ph type="sldImg" idx="2"/>
@@ -505,7 +299,7 @@
             <a:spLocks noGrp="1"/>
           </p:cNvSpPr>
           <p:nvPr>
-            <p:ph type="body" idx="3" sz="quarter"/>
+            <p:ph type="body" sz="quarter" idx="3"/>
           </p:nvPr>
         </p:nvSpPr>
         <p:spPr/>
@@ -514,6 +308,7 @@
           <a:lstStyle/>
           <a:p>
             <a:r>
+              <a:rPr dirty="0"/>
               <a:t>This deck is about recovering the position, depth, and radius of a single rebar in concrete from a ground-penetrating radar B-scan. Everything is synthetic — observed data and candidate data come from the same wave-equation solver, so any failure we see is in the inverse pipeline, not the physics. The story has three pieces. First, the forward model is a GPU-accelerated 2D finite-difference time-domain solver with absorbing boundaries, batched across scan positions. Second, the inversion is a staged solver — coarse global search, then fine continuous refinement, then a deterministic local grid polish. Third, the result is exact recovery on clean data, and the polished radius stays correct under additive noise up to ten percent. Where the radius starts becoming ambiguous, the pipeline reports a top-k list rather than a single point estimate.</a:t>
             </a:r>
           </a:p>
@@ -526,7 +321,7 @@
             <a:spLocks noGrp="1"/>
           </p:cNvSpPr>
           <p:nvPr>
-            <p:ph type="sldNum" idx="5" sz="quarter"/>
+            <p:ph type="sldNum" sz="quarter" idx="5"/>
           </p:nvPr>
         </p:nvSpPr>
         <p:spPr/>
@@ -540,7 +335,7 @@
 </file>
 
 <file path=ppt/notesSlides/notesSlide10.xml><?xml version="1.0" encoding="utf-8"?>
-<p:notes xmlns:a="http://schemas.openxmlformats.org/drawingml/2006/main" xmlns:p="http://schemas.openxmlformats.org/presentationml/2006/main" xmlns:r="http://schemas.openxmlformats.org/officeDocument/2006/relationships">
+<p:notes xmlns:a="http://schemas.openxmlformats.org/drawingml/2006/main" xmlns:r="http://schemas.openxmlformats.org/officeDocument/2006/relationships" xmlns:p="http://schemas.openxmlformats.org/presentationml/2006/main">
   <p:cSld>
     <p:spTree>
       <p:nvGrpSpPr>
@@ -560,7 +355,7 @@
         <p:nvSpPr>
           <p:cNvPr id="2" name="Slide Image Placeholder 1"/>
           <p:cNvSpPr>
-            <a:spLocks noGrp="1"/>
+            <a:spLocks noGrp="1" noRot="1" noChangeAspect="1"/>
           </p:cNvSpPr>
           <p:nvPr>
             <p:ph type="sldImg" idx="2"/>
@@ -575,7 +370,7 @@
             <a:spLocks noGrp="1"/>
           </p:cNvSpPr>
           <p:nvPr>
-            <p:ph type="body" idx="3" sz="quarter"/>
+            <p:ph type="body" sz="quarter" idx="3"/>
           </p:nvPr>
         </p:nvSpPr>
         <p:spPr/>
@@ -584,7 +379,16 @@
           <a:lstStyle/>
           <a:p>
             <a:r>
-              <a:t>These two panels are direct diagnostics of the inversion objective landscape — not optimisation runs, just the objective evaluated on a grid of candidates. The left panel fixes the radius at the true value and sweeps x and z; the dark minimum sits exactly at the true position and the landscape is smoothly convex around it. The right panel fixes x at the true value and sweeps z and radius; here we see the elongated diagonal valley where deeper-and-larger and shallower-and-smaller candidates all fit the data almost equally well. That valley is the geometric origin of the radius bias we have been discussing. The polish stage works because it enumerates discrete cells across this valley rather than following a gradient down it.</a:t>
+              <a:rPr dirty="0"/>
+              <a:t>These two panels are direct diagnostics of the inversion objective landscape — not </a:t>
+            </a:r>
+            <a:r>
+              <a:rPr dirty="0" err="1"/>
+              <a:t>optimisation</a:t>
+            </a:r>
+            <a:r>
+              <a:rPr dirty="0"/>
+              <a:t> runs, just the objective evaluated on a grid of candidates. The left panel fixes the radius at the true value and sweeps x and z; the dark minimum sits exactly at the true position and the landscape is smoothly convex around it. The right panel fixes x at the true value and sweeps z and radius; here we see the elongated diagonal valley where deeper-and-larger and shallower-and-smaller candidates all fit the data almost equally well. That valley is the geometric origin of the radius bias we have been discussing. The polish stage works because it enumerates discrete cells across this valley rather than following a gradient down it.</a:t>
             </a:r>
           </a:p>
         </p:txBody>
@@ -596,7 +400,7 @@
             <a:spLocks noGrp="1"/>
           </p:cNvSpPr>
           <p:nvPr>
-            <p:ph type="sldNum" idx="5" sz="quarter"/>
+            <p:ph type="sldNum" sz="quarter" idx="5"/>
           </p:nvPr>
         </p:nvSpPr>
         <p:spPr/>
@@ -610,7 +414,7 @@
 </file>
 
 <file path=ppt/notesSlides/notesSlide11.xml><?xml version="1.0" encoding="utf-8"?>
-<p:notes xmlns:a="http://schemas.openxmlformats.org/drawingml/2006/main" xmlns:p="http://schemas.openxmlformats.org/presentationml/2006/main" xmlns:r="http://schemas.openxmlformats.org/officeDocument/2006/relationships">
+<p:notes xmlns:a="http://schemas.openxmlformats.org/drawingml/2006/main" xmlns:r="http://schemas.openxmlformats.org/officeDocument/2006/relationships" xmlns:p="http://schemas.openxmlformats.org/presentationml/2006/main">
   <p:cSld>
     <p:spTree>
       <p:nvGrpSpPr>
@@ -630,7 +434,7 @@
         <p:nvSpPr>
           <p:cNvPr id="2" name="Slide Image Placeholder 1"/>
           <p:cNvSpPr>
-            <a:spLocks noGrp="1"/>
+            <a:spLocks noGrp="1" noRot="1" noChangeAspect="1"/>
           </p:cNvSpPr>
           <p:nvPr>
             <p:ph type="sldImg" idx="2"/>
@@ -645,7 +449,7 @@
             <a:spLocks noGrp="1"/>
           </p:cNvSpPr>
           <p:nvPr>
-            <p:ph type="body" idx="3" sz="quarter"/>
+            <p:ph type="body" sz="quarter" idx="3"/>
           </p:nvPr>
         </p:nvSpPr>
         <p:spPr/>
@@ -654,7 +458,16 @@
           <a:lstStyle/>
           <a:p>
             <a:r>
-              <a:t>The point of this slide is not that the data misfit is small — under noise the misfit cannot be smaller than the noise floor. The point is that the recovered geometry does not move. Across two noise seeds and four noise levels — exact, one percent, five percent, and ten percent additive trace-RMS noise — the polished radius is exactly 6.0 mm in every case. The data-misfit bars on the right rise linearly with the injected noise level, exactly as they should: the residual is now fully explained by the noise we added, not by a bad model. The model-misfit row stays at zero throughout because the rasterised geometry the polish selects is unchanged. This is what makes the polish stage worth defending under realistic conditions.</a:t>
+              <a:rPr dirty="0"/>
+              <a:t>The point of this slide is not that the data misfit is small — under noise the misfit cannot be smaller than the noise floor. The point is that the recovered geometry does not move. Across two noise seeds and four noise levels — exact, one percent, five percent, and ten percent additive trace-RMS noise — the polished radius is exactly 6.0 mm in every case. The data-misfit bars on the right rise linearly with the injected noise level, exactly as they should: the residual is now fully explained by the noise we added, not by a bad model. The model-misfit row stays at zero throughout because the </a:t>
+            </a:r>
+            <a:r>
+              <a:rPr dirty="0" err="1"/>
+              <a:t>rasterised</a:t>
+            </a:r>
+            <a:r>
+              <a:rPr dirty="0"/>
+              <a:t> geometry the polish selects is unchanged. This is what makes the polish stage worth defending under realistic conditions.</a:t>
             </a:r>
           </a:p>
         </p:txBody>
@@ -666,7 +479,7 @@
             <a:spLocks noGrp="1"/>
           </p:cNvSpPr>
           <p:nvPr>
-            <p:ph type="sldNum" idx="5" sz="quarter"/>
+            <p:ph type="sldNum" sz="quarter" idx="5"/>
           </p:nvPr>
         </p:nvSpPr>
         <p:spPr/>
@@ -680,7 +493,7 @@
 </file>
 
 <file path=ppt/notesSlides/notesSlide12.xml><?xml version="1.0" encoding="utf-8"?>
-<p:notes xmlns:a="http://schemas.openxmlformats.org/drawingml/2006/main" xmlns:p="http://schemas.openxmlformats.org/presentationml/2006/main" xmlns:r="http://schemas.openxmlformats.org/officeDocument/2006/relationships">
+<p:notes xmlns:a="http://schemas.openxmlformats.org/drawingml/2006/main" xmlns:r="http://schemas.openxmlformats.org/officeDocument/2006/relationships" xmlns:p="http://schemas.openxmlformats.org/presentationml/2006/main">
   <p:cSld>
     <p:spTree>
       <p:nvGrpSpPr>
@@ -700,7 +513,7 @@
         <p:nvSpPr>
           <p:cNvPr id="2" name="Slide Image Placeholder 1"/>
           <p:cNvSpPr>
-            <a:spLocks noGrp="1"/>
+            <a:spLocks noGrp="1" noRot="1" noChangeAspect="1"/>
           </p:cNvSpPr>
           <p:nvPr>
             <p:ph type="sldImg" idx="2"/>
@@ -715,7 +528,7 @@
             <a:spLocks noGrp="1"/>
           </p:cNvSpPr>
           <p:nvPr>
-            <p:ph type="body" idx="3" sz="quarter"/>
+            <p:ph type="body" sz="quarter" idx="3"/>
           </p:nvPr>
         </p:nvSpPr>
         <p:spPr/>
@@ -724,7 +537,16 @@
           <a:lstStyle/>
           <a:p>
             <a:r>
-              <a:t>This slide calibrates where the pipeline starts to lose radius discrimination. The eight bars are the top eight polish candidates at ten percent additive noise, sorted by their objective values. The true 6.0 mm radius still wins in two equivalent depth cells, but the margin against the next-distinct radius — 6.2 mm — is only about 5.6e-4. That is a real margin, but it is small enough that beyond this noise level we should not trust a single point estimate. The pipeline's recommended behaviour at this regime is to report the top-k candidates plus the distinct-radius margin and let the user decide how to interpret. It also tells us not to use the zero-misfit early-stop option on noisy data, because the true model cannot reach zero misfit when noise is present.</a:t>
+              <a:rPr dirty="0"/>
+              <a:t>This slide calibrates where the pipeline starts to lose radius discrimination. The eight bars are the top eight polish candidates at ten percent additive noise, sorted by their objective values. The true 6.0 mm radius still wins in two equivalent depth cells, but the margin against the next-distinct radius — 6.2 mm — is only about 5.6e-4. That is a real margin, but it is small enough that beyond this noise level we should not trust a single point estimate. The pipeline's recommended </a:t>
+            </a:r>
+            <a:r>
+              <a:rPr dirty="0" err="1"/>
+              <a:t>behaviour</a:t>
+            </a:r>
+            <a:r>
+              <a:rPr dirty="0"/>
+              <a:t> at this regime is to report the top-k candidates plus the distinct-radius margin and let the user decide how to interpret. It also tells us not to use the zero-misfit early-stop option on noisy data, because the true model cannot reach zero misfit when noise is present.</a:t>
             </a:r>
           </a:p>
         </p:txBody>
@@ -736,7 +558,7 @@
             <a:spLocks noGrp="1"/>
           </p:cNvSpPr>
           <p:nvPr>
-            <p:ph type="sldNum" idx="5" sz="quarter"/>
+            <p:ph type="sldNum" sz="quarter" idx="5"/>
           </p:nvPr>
         </p:nvSpPr>
         <p:spPr/>
@@ -750,7 +572,7 @@
 </file>
 
 <file path=ppt/notesSlides/notesSlide13.xml><?xml version="1.0" encoding="utf-8"?>
-<p:notes xmlns:a="http://schemas.openxmlformats.org/drawingml/2006/main" xmlns:p="http://schemas.openxmlformats.org/presentationml/2006/main" xmlns:r="http://schemas.openxmlformats.org/officeDocument/2006/relationships">
+<p:notes xmlns:a="http://schemas.openxmlformats.org/drawingml/2006/main" xmlns:r="http://schemas.openxmlformats.org/officeDocument/2006/relationships" xmlns:p="http://schemas.openxmlformats.org/presentationml/2006/main">
   <p:cSld>
     <p:spTree>
       <p:nvGrpSpPr>
@@ -770,7 +592,7 @@
         <p:nvSpPr>
           <p:cNvPr id="2" name="Slide Image Placeholder 1"/>
           <p:cNvSpPr>
-            <a:spLocks noGrp="1"/>
+            <a:spLocks noGrp="1" noRot="1" noChangeAspect="1"/>
           </p:cNvSpPr>
           <p:nvPr>
             <p:ph type="sldImg" idx="2"/>
@@ -785,7 +607,7 @@
             <a:spLocks noGrp="1"/>
           </p:cNvSpPr>
           <p:nvPr>
-            <p:ph type="body" idx="3" sz="quarter"/>
+            <p:ph type="body" sz="quarter" idx="3"/>
           </p:nvPr>
         </p:nvSpPr>
         <p:spPr/>
@@ -794,6 +616,7 @@
           <a:lstStyle/>
           <a:p>
             <a:r>
+              <a:rPr dirty="0"/>
               <a:t>The three forward directions all lift one assumption of the current twin experiment. Multi-rebar re-introduces two or three rebars; the polish stage and identifiability hierarchy carry over, but the global search stage gets harder because the basin landscape becomes multi-modal. Nuisance parameters means letting concrete permittivity, conductivity, time-zero, and source wavelet float — this is the realism gap that shows up in the FWI literature, and radius identifiability depends on calibrating it. Field-style validation adds a hyperbola-fitting and migration baseline so we can quantify what full-waveform inversion buys over simpler methods, and lets us cross-check the forward model against an independent solver. The pipeline pieces that transfer directly are the forward model, the numbered-run convention, and the grid-polish stage. The new work is in the search strategy and in mapping which parameters the observed data actually constrains.</a:t>
             </a:r>
           </a:p>
@@ -806,7 +629,7 @@
             <a:spLocks noGrp="1"/>
           </p:cNvSpPr>
           <p:nvPr>
-            <p:ph type="sldNum" idx="5" sz="quarter"/>
+            <p:ph type="sldNum" sz="quarter" idx="5"/>
           </p:nvPr>
         </p:nvSpPr>
         <p:spPr/>
@@ -820,7 +643,7 @@
 </file>
 
 <file path=ppt/notesSlides/notesSlide2.xml><?xml version="1.0" encoding="utf-8"?>
-<p:notes xmlns:a="http://schemas.openxmlformats.org/drawingml/2006/main" xmlns:p="http://schemas.openxmlformats.org/presentationml/2006/main" xmlns:r="http://schemas.openxmlformats.org/officeDocument/2006/relationships">
+<p:notes xmlns:a="http://schemas.openxmlformats.org/drawingml/2006/main" xmlns:r="http://schemas.openxmlformats.org/officeDocument/2006/relationships" xmlns:p="http://schemas.openxmlformats.org/presentationml/2006/main">
   <p:cSld>
     <p:spTree>
       <p:nvGrpSpPr>
@@ -840,7 +663,7 @@
         <p:nvSpPr>
           <p:cNvPr id="2" name="Slide Image Placeholder 1"/>
           <p:cNvSpPr>
-            <a:spLocks noGrp="1"/>
+            <a:spLocks noGrp="1" noRot="1" noChangeAspect="1"/>
           </p:cNvSpPr>
           <p:nvPr>
             <p:ph type="sldImg" idx="2"/>
@@ -855,7 +678,7 @@
             <a:spLocks noGrp="1"/>
           </p:cNvSpPr>
           <p:nvPr>
-            <p:ph type="body" idx="3" sz="quarter"/>
+            <p:ph type="body" sz="quarter" idx="3"/>
           </p:nvPr>
         </p:nvSpPr>
         <p:spPr/>
@@ -864,7 +687,24 @@
           <a:lstStyle/>
           <a:p>
             <a:r>
-              <a:t>The unknowns are intentionally tiny. We are not estimating a full subsurface image — only three numbers from a B-scan: lateral position, depth, and radius of one circular rebar. That keeps the inverse problem clean enough to diagnose identifiability. The twin-experiment design — observed and candidate B-scans come from the same forward operator — means any wrong answer must come from the inverse pipeline. The identifiability hierarchy on the left is consistent with the GPR-FWI literature: lateral position is set by the hyperbola apex, depth is set by the moveout once velocity is known, and radius is the weakly identified quantity that couples to nuisance parameters and to the grid. The true model on the right is what the observed B-scan is synthesised from; the initial guess is deliberately offset so the optimiser has real work to do.</a:t>
+              <a:rPr dirty="0"/>
+              <a:t>The unknowns are intentionally tiny. We are not estimating a full subsurface image — only three numbers from a B-scan: lateral position, depth, and radius of one circular rebar. That keeps the inverse problem clean enough to diagnose identifiability. The twin-experiment design — observed and candidate B-scans come from the same forward operator — means any wrong answer must come from the inverse pipeline. The identifiability hierarchy on the left is consistent with the GPR-FWI literature: lateral position is set by the hyperbola apex, depth is set by the moveout once velocity is known, and radius is the weakly identified quantity that couples to nuisance parameters and to the grid. The true model on the right is what the observed B-scan is </a:t>
+            </a:r>
+            <a:r>
+              <a:rPr dirty="0" err="1"/>
+              <a:t>synthesised</a:t>
+            </a:r>
+            <a:r>
+              <a:rPr dirty="0"/>
+              <a:t> from; the initial guess is deliberately offset so the </a:t>
+            </a:r>
+            <a:r>
+              <a:rPr dirty="0" err="1"/>
+              <a:t>optimiser</a:t>
+            </a:r>
+            <a:r>
+              <a:rPr dirty="0"/>
+              <a:t> has real work to do.</a:t>
             </a:r>
           </a:p>
         </p:txBody>
@@ -876,7 +716,7 @@
             <a:spLocks noGrp="1"/>
           </p:cNvSpPr>
           <p:nvPr>
-            <p:ph type="sldNum" idx="5" sz="quarter"/>
+            <p:ph type="sldNum" sz="quarter" idx="5"/>
           </p:nvPr>
         </p:nvSpPr>
         <p:spPr/>
@@ -890,7 +730,7 @@
 </file>
 
 <file path=ppt/notesSlides/notesSlide3.xml><?xml version="1.0" encoding="utf-8"?>
-<p:notes xmlns:a="http://schemas.openxmlformats.org/drawingml/2006/main" xmlns:p="http://schemas.openxmlformats.org/presentationml/2006/main" xmlns:r="http://schemas.openxmlformats.org/officeDocument/2006/relationships">
+<p:notes xmlns:a="http://schemas.openxmlformats.org/drawingml/2006/main" xmlns:r="http://schemas.openxmlformats.org/officeDocument/2006/relationships" xmlns:p="http://schemas.openxmlformats.org/presentationml/2006/main">
   <p:cSld>
     <p:spTree>
       <p:nvGrpSpPr>
@@ -910,7 +750,7 @@
         <p:nvSpPr>
           <p:cNvPr id="2" name="Slide Image Placeholder 1"/>
           <p:cNvSpPr>
-            <a:spLocks noGrp="1"/>
+            <a:spLocks noGrp="1" noRot="1" noChangeAspect="1"/>
           </p:cNvSpPr>
           <p:nvPr>
             <p:ph type="sldImg" idx="2"/>
@@ -925,7 +765,7 @@
             <a:spLocks noGrp="1"/>
           </p:cNvSpPr>
           <p:nvPr>
-            <p:ph type="body" idx="3" sz="quarter"/>
+            <p:ph type="body" sz="quarter" idx="3"/>
           </p:nvPr>
         </p:nvSpPr>
         <p:spPr/>
@@ -934,7 +774,24 @@
           <a:lstStyle/>
           <a:p>
             <a:r>
-              <a:t>The same forward model sits at the top, used by all three stages — what changes from stage to stage is the search strategy and the grid resolution. Stage one is a coarse global search on a 2 mm grid using differential evolution. Its job is to find the right basin in (x, z, r); it does not need to be accurate. Stage two takes that seed and runs a fine continuous local search on the production 1 mm grid using SciPy's derivative-free Powell optimiser. It locks in lateral position and depth, but it consistently biases the radius slightly high because of a depth–radius coupling we will see in a moment. Stage three is a deterministic small grid search over depth and radius on the 1 mm grid. It is the step that closes the radius gap by accepting that the rasterised geometry is piecewise constant in physical coordinates.</a:t>
+              <a:rPr dirty="0"/>
+              <a:t>The same forward model sits at the top, used by all three stages — what changes from stage to stage is the search strategy and the grid resolution. Stage one is a coarse global search on a 2 mm grid using differential evolution. Its job is to find the right basin in (x, z, r); it does not need to be accurate. Stage two takes that seed and runs a fine continuous local search on the production 1 mm grid using SciPy's derivative-free Powell </a:t>
+            </a:r>
+            <a:r>
+              <a:rPr dirty="0" err="1"/>
+              <a:t>optimiser</a:t>
+            </a:r>
+            <a:r>
+              <a:rPr dirty="0"/>
+              <a:t>. It locks in lateral position and depth, but it consistently biases the radius slightly high because of a depth–radius coupling we will see in a moment. Stage three is a deterministic small grid search over depth and radius on the 1 mm grid. It is the step that closes the radius gap by accepting that the </a:t>
+            </a:r>
+            <a:r>
+              <a:rPr dirty="0" err="1"/>
+              <a:t>rasterised</a:t>
+            </a:r>
+            <a:r>
+              <a:rPr dirty="0"/>
+              <a:t> geometry is piecewise constant in physical coordinates.</a:t>
             </a:r>
           </a:p>
         </p:txBody>
@@ -946,7 +803,7 @@
             <a:spLocks noGrp="1"/>
           </p:cNvSpPr>
           <p:nvPr>
-            <p:ph type="sldNum" idx="5" sz="quarter"/>
+            <p:ph type="sldNum" sz="quarter" idx="5"/>
           </p:nvPr>
         </p:nvSpPr>
         <p:spPr/>
@@ -960,7 +817,7 @@
 </file>
 
 <file path=ppt/notesSlides/notesSlide4.xml><?xml version="1.0" encoding="utf-8"?>
-<p:notes xmlns:a="http://schemas.openxmlformats.org/drawingml/2006/main" xmlns:p="http://schemas.openxmlformats.org/presentationml/2006/main" xmlns:r="http://schemas.openxmlformats.org/officeDocument/2006/relationships">
+<p:notes xmlns:a="http://schemas.openxmlformats.org/drawingml/2006/main" xmlns:r="http://schemas.openxmlformats.org/officeDocument/2006/relationships" xmlns:p="http://schemas.openxmlformats.org/presentationml/2006/main">
   <p:cSld>
     <p:spTree>
       <p:nvGrpSpPr>
@@ -980,7 +837,7 @@
         <p:nvSpPr>
           <p:cNvPr id="2" name="Slide Image Placeholder 1"/>
           <p:cNvSpPr>
-            <a:spLocks noGrp="1"/>
+            <a:spLocks noGrp="1" noRot="1" noChangeAspect="1"/>
           </p:cNvSpPr>
           <p:nvPr>
             <p:ph type="sldImg" idx="2"/>
@@ -995,7 +852,7 @@
             <a:spLocks noGrp="1"/>
           </p:cNvSpPr>
           <p:nvPr>
-            <p:ph type="body" idx="3" sz="quarter"/>
+            <p:ph type="body" sz="quarter" idx="3"/>
           </p:nvPr>
         </p:nvSpPr>
         <p:spPr/>
@@ -1004,7 +861,16 @@
           <a:lstStyle/>
           <a:p>
             <a:r>
-              <a:t>The forward model is a 2D transverse-magnetic finite-difference time-domain solver on a Yee staggered grid, with convolutional perfectly matched layer boundaries to absorb outgoing waves. It runs on the GPU through CuPy. The important property for inversion runtime is that the batched B-scan path advances every scan position in one GPU launch, so a single objective evaluation costs roughly the same as a single forward solve. Every change to the solver is parity-tested against the CPU reference for both the single-trace and the batched paths, so GPU regressions are caught early. Every inversion or diagnostic run writes a manifest with the exact command, git commit, backend, and summary path, so the experiment log is reproducible. On the right is one observed B-scan with five scan positions; the rebar hyperbola sits near 2 nanoseconds.</a:t>
+              <a:rPr dirty="0"/>
+              <a:t>The forward model is a 2D transverse-magnetic finite-difference time-domain solver on a Yee staggered grid, with convolutional perfectly matched layer boundaries to absorb outgoing waves. It runs on the GPU through </a:t>
+            </a:r>
+            <a:r>
+              <a:rPr dirty="0" err="1"/>
+              <a:t>CuPy</a:t>
+            </a:r>
+            <a:r>
+              <a:rPr dirty="0"/>
+              <a:t>. The important property for inversion runtime is that the batched B-scan path advances every scan position in one GPU launch, so a single objective evaluation costs roughly the same as a single forward solve. Every change to the solver is parity-tested against the CPU reference for both the single-trace and the batched paths, so GPU regressions are caught early. Every inversion or diagnostic run writes a manifest with the exact command, git commit, backend, and summary path, so the experiment log is reproducible. On the right is one observed B-scan with five scan positions; the rebar hyperbola sits near 2 nanoseconds.</a:t>
             </a:r>
           </a:p>
         </p:txBody>
@@ -1016,7 +882,7 @@
             <a:spLocks noGrp="1"/>
           </p:cNvSpPr>
           <p:nvPr>
-            <p:ph type="sldNum" idx="5" sz="quarter"/>
+            <p:ph type="sldNum" sz="quarter" idx="5"/>
           </p:nvPr>
         </p:nvSpPr>
         <p:spPr/>
@@ -1030,7 +896,7 @@
 </file>
 
 <file path=ppt/notesSlides/notesSlide5.xml><?xml version="1.0" encoding="utf-8"?>
-<p:notes xmlns:a="http://schemas.openxmlformats.org/drawingml/2006/main" xmlns:p="http://schemas.openxmlformats.org/presentationml/2006/main" xmlns:r="http://schemas.openxmlformats.org/officeDocument/2006/relationships">
+<p:notes xmlns:a="http://schemas.openxmlformats.org/drawingml/2006/main" xmlns:r="http://schemas.openxmlformats.org/officeDocument/2006/relationships" xmlns:p="http://schemas.openxmlformats.org/presentationml/2006/main">
   <p:cSld>
     <p:spTree>
       <p:nvGrpSpPr>
@@ -1050,7 +916,7 @@
         <p:nvSpPr>
           <p:cNvPr id="2" name="Slide Image Placeholder 1"/>
           <p:cNvSpPr>
-            <a:spLocks noGrp="1"/>
+            <a:spLocks noGrp="1" noRot="1" noChangeAspect="1"/>
           </p:cNvSpPr>
           <p:nvPr>
             <p:ph type="sldImg" idx="2"/>
@@ -1065,7 +931,7 @@
             <a:spLocks noGrp="1"/>
           </p:cNvSpPr>
           <p:nvPr>
-            <p:ph type="body" idx="3" sz="quarter"/>
+            <p:ph type="body" sz="quarter" idx="3"/>
           </p:nvPr>
         </p:nvSpPr>
         <p:spPr/>
@@ -1074,7 +940,32 @@
           <a:lstStyle/>
           <a:p>
             <a:r>
-              <a:t>Both panels show the inversion objective as a function of radius, on a log scale. The only thing that changes between the left and right panels is the grid step of the forward model. On the 2 mm grid, the radius values 4.5, 5.0, and 5.5 all sit on a flat plateau because the circular rebar rasterises to the same set of cells for all three — the optimiser literally cannot distinguish them. The 1 mm grid breaks those plateaus and gives us a clean V-shape with the true 6.0 mm radius at the bottom. The implication is important: radius identifiability in this code is dominated by geometry discretisation. We tried multi-frequency stacking first; it did not fix the plateau. A finer grid did. That is why the production pipeline runs at 1 mm even though the seed stage uses 2 mm for speed.</a:t>
+              <a:rPr dirty="0"/>
+              <a:t>Both panels show the inversion objective as a function of radius, on a log scale. The only thing that changes between the left and right panels is the grid step of the forward model. On the 2 mm grid, the radius values 4.5, 5.0, and 5.5 all sit on a flat plateau because the circular rebar </a:t>
+            </a:r>
+            <a:r>
+              <a:rPr dirty="0" err="1"/>
+              <a:t>rasterises</a:t>
+            </a:r>
+            <a:r>
+              <a:rPr dirty="0"/>
+              <a:t> to the same set of cells for all three — the </a:t>
+            </a:r>
+            <a:r>
+              <a:rPr dirty="0" err="1"/>
+              <a:t>optimiser</a:t>
+            </a:r>
+            <a:r>
+              <a:rPr dirty="0"/>
+              <a:t> literally cannot distinguish them. The 1 mm grid breaks those plateaus and gives us a clean V-shape with the true 6.0 mm radius at the bottom. The implication is important: radius identifiability in this code is dominated by geometry </a:t>
+            </a:r>
+            <a:r>
+              <a:rPr dirty="0" err="1"/>
+              <a:t>discretisation</a:t>
+            </a:r>
+            <a:r>
+              <a:rPr dirty="0"/>
+              <a:t>. We tried multi-frequency stacking first; it did not fix the plateau. A finer grid did. That is why the production pipeline runs at 1 mm even though the seed stage uses 2 mm for speed.</a:t>
             </a:r>
           </a:p>
         </p:txBody>
@@ -1086,7 +977,7 @@
             <a:spLocks noGrp="1"/>
           </p:cNvSpPr>
           <p:nvPr>
-            <p:ph type="sldNum" idx="5" sz="quarter"/>
+            <p:ph type="sldNum" sz="quarter" idx="5"/>
           </p:nvPr>
         </p:nvSpPr>
         <p:spPr/>
@@ -1100,7 +991,7 @@
 </file>
 
 <file path=ppt/notesSlides/notesSlide6.xml><?xml version="1.0" encoding="utf-8"?>
-<p:notes xmlns:a="http://schemas.openxmlformats.org/drawingml/2006/main" xmlns:p="http://schemas.openxmlformats.org/presentationml/2006/main" xmlns:r="http://schemas.openxmlformats.org/officeDocument/2006/relationships">
+<p:notes xmlns:a="http://schemas.openxmlformats.org/drawingml/2006/main" xmlns:r="http://schemas.openxmlformats.org/officeDocument/2006/relationships" xmlns:p="http://schemas.openxmlformats.org/presentationml/2006/main">
   <p:cSld>
     <p:spTree>
       <p:nvGrpSpPr>
@@ -1120,7 +1011,7 @@
         <p:nvSpPr>
           <p:cNvPr id="2" name="Slide Image Placeholder 1"/>
           <p:cNvSpPr>
-            <a:spLocks noGrp="1"/>
+            <a:spLocks noGrp="1" noRot="1" noChangeAspect="1"/>
           </p:cNvSpPr>
           <p:nvPr>
             <p:ph type="sldImg" idx="2"/>
@@ -1135,7 +1026,7 @@
             <a:spLocks noGrp="1"/>
           </p:cNvSpPr>
           <p:nvPr>
-            <p:ph type="body" idx="3" sz="quarter"/>
+            <p:ph type="body" sz="quarter" idx="3"/>
           </p:nvPr>
         </p:nvSpPr>
         <p:spPr/>
@@ -1144,7 +1035,16 @@
           <a:lstStyle/>
           <a:p>
             <a:r>
-              <a:t>This is the central technical insight of the deck. The continuous Powell optimiser stops at radius about 6.8 mm and depth about 0.65 mm deeper than truth, with a small but non-zero misfit. When we fix x and z and profile radius alone, the right answer is 6.0 mm exactly. When we fix x and the wrong depth and profile radius, we get the same 6.8 mm Powell found. So a deeper rebar trades against a larger radius and produces a near-identical waveform — the objective near the optimum is an elongated valley, not a clean basin. Adding more scan positions narrows the valley but does not move its radius minimum, because the trade-off is intrinsic to the physics at the wavelengths we are using. The remedy cannot come from more data; it has to come from the search strategy. That is what motivates stage 3.</a:t>
+              <a:rPr dirty="0"/>
+              <a:t>This is the central technical insight of the deck. The continuous Powell </a:t>
+            </a:r>
+            <a:r>
+              <a:rPr dirty="0" err="1"/>
+              <a:t>optimiser</a:t>
+            </a:r>
+            <a:r>
+              <a:rPr dirty="0"/>
+              <a:t> stops at radius about 6.8 mm and depth about 0.65 mm deeper than truth, with a small but non-zero misfit. When we fix x and z and profile radius alone, the right answer is 6.0 mm exactly. When we fix x and the wrong depth and profile radius, we get the same 6.8 mm Powell found. So a deeper rebar trades against a larger radius and produces a near-identical waveform — the objective near the optimum is an elongated valley, not a clean basin. Adding more scan positions narrows the valley but does not move its radius minimum, because the trade-off is intrinsic to the physics at the wavelengths we are using. The remedy cannot come from more data; it has to come from the search strategy. That is what motivates stage 3.</a:t>
             </a:r>
           </a:p>
         </p:txBody>
@@ -1156,7 +1056,7 @@
             <a:spLocks noGrp="1"/>
           </p:cNvSpPr>
           <p:nvPr>
-            <p:ph type="sldNum" idx="5" sz="quarter"/>
+            <p:ph type="sldNum" sz="quarter" idx="5"/>
           </p:nvPr>
         </p:nvSpPr>
         <p:spPr/>
@@ -1170,7 +1070,7 @@
 </file>
 
 <file path=ppt/notesSlides/notesSlide7.xml><?xml version="1.0" encoding="utf-8"?>
-<p:notes xmlns:a="http://schemas.openxmlformats.org/drawingml/2006/main" xmlns:p="http://schemas.openxmlformats.org/presentationml/2006/main" xmlns:r="http://schemas.openxmlformats.org/officeDocument/2006/relationships">
+<p:notes xmlns:a="http://schemas.openxmlformats.org/drawingml/2006/main" xmlns:r="http://schemas.openxmlformats.org/officeDocument/2006/relationships" xmlns:p="http://schemas.openxmlformats.org/presentationml/2006/main">
   <p:cSld>
     <p:spTree>
       <p:nvGrpSpPr>
@@ -1190,7 +1090,7 @@
         <p:nvSpPr>
           <p:cNvPr id="2" name="Slide Image Placeholder 1"/>
           <p:cNvSpPr>
-            <a:spLocks noGrp="1"/>
+            <a:spLocks noGrp="1" noRot="1" noChangeAspect="1"/>
           </p:cNvSpPr>
           <p:nvPr>
             <p:ph type="sldImg" idx="2"/>
@@ -1205,7 +1105,7 @@
             <a:spLocks noGrp="1"/>
           </p:cNvSpPr>
           <p:nvPr>
-            <p:ph type="body" idx="3" sz="quarter"/>
+            <p:ph type="body" sz="quarter" idx="3"/>
           </p:nvPr>
         </p:nvSpPr>
         <p:spPr/>
@@ -1214,7 +1114,32 @@
           <a:lstStyle/>
           <a:p>
             <a:r>
-              <a:t>The grid polish is the single most important step for radius in this pipeline. It is conceptually simple: take Powell's approximate answer, build a small list of nearby (depth, radius) candidates on an absolute millimetre grid, run the forward solver on each, and pick the best. The default is a 40-candidate coarse grid with depth step 0.5 mm and radius step 0.2 mm; an 160-candidate fine preset exists for audit runs. The polish also keeps the top few candidates, not just the winner, so the margin between the chosen geometry and its closest competitor is auditable. On the right, Powell hands off radius 6.96 mm with a small but non-zero misfit. After polish, we land at radius 6.00 mm with misfit zero. The depth reads 89.75 mm rather than 90.00 mm because at this 1 mm grid resolution the rasterised circle is identical for several sub-millimetre depth values — that is a representation detail, not a result detail.</a:t>
+              <a:rPr dirty="0"/>
+              <a:t>The grid polish is the single most important step for radius in this pipeline. It is conceptually simple: take Powell's approximate answer, build a small list of nearby (depth, radius) candidates on an absolute </a:t>
+            </a:r>
+            <a:r>
+              <a:rPr dirty="0" err="1"/>
+              <a:t>millimetre</a:t>
+            </a:r>
+            <a:r>
+              <a:rPr dirty="0"/>
+              <a:t> grid, run the forward solver on each, and pick the best. The default is a 40-candidate coarse grid with depth step 0.5 mm and radius step 0.2 mm; an 160-candidate fine preset exists for audit runs. The polish also keeps the top few candidates, not just the winner, so the margin between the chosen geometry and its closest competitor is auditable. On the right, Powell hands off radius 6.96 mm with a small but non-zero misfit. After polish, we land at radius 6.00 mm with misfit zero. The depth reads 89.75 mm rather than 90.00 mm because at this 1 mm grid resolution the </a:t>
+            </a:r>
+            <a:r>
+              <a:rPr dirty="0" err="1"/>
+              <a:t>rasterised</a:t>
+            </a:r>
+            <a:r>
+              <a:rPr dirty="0"/>
+              <a:t> circle is identical for several sub-</a:t>
+            </a:r>
+            <a:r>
+              <a:rPr dirty="0" err="1"/>
+              <a:t>millimetre</a:t>
+            </a:r>
+            <a:r>
+              <a:rPr dirty="0"/>
+              <a:t> depth values — that is a representation detail, not a result detail.</a:t>
             </a:r>
           </a:p>
         </p:txBody>
@@ -1226,7 +1151,7 @@
             <a:spLocks noGrp="1"/>
           </p:cNvSpPr>
           <p:nvPr>
-            <p:ph type="sldNum" idx="5" sz="quarter"/>
+            <p:ph type="sldNum" sz="quarter" idx="5"/>
           </p:nvPr>
         </p:nvSpPr>
         <p:spPr/>
@@ -1240,7 +1165,7 @@
 </file>
 
 <file path=ppt/notesSlides/notesSlide8.xml><?xml version="1.0" encoding="utf-8"?>
-<p:notes xmlns:a="http://schemas.openxmlformats.org/drawingml/2006/main" xmlns:p="http://schemas.openxmlformats.org/presentationml/2006/main" xmlns:r="http://schemas.openxmlformats.org/officeDocument/2006/relationships">
+<p:notes xmlns:a="http://schemas.openxmlformats.org/drawingml/2006/main" xmlns:r="http://schemas.openxmlformats.org/officeDocument/2006/relationships" xmlns:p="http://schemas.openxmlformats.org/presentationml/2006/main">
   <p:cSld>
     <p:spTree>
       <p:nvGrpSpPr>
@@ -1260,7 +1185,7 @@
         <p:nvSpPr>
           <p:cNvPr id="2" name="Slide Image Placeholder 1"/>
           <p:cNvSpPr>
-            <a:spLocks noGrp="1"/>
+            <a:spLocks noGrp="1" noRot="1" noChangeAspect="1"/>
           </p:cNvSpPr>
           <p:nvPr>
             <p:ph type="sldImg" idx="2"/>
@@ -1275,7 +1200,7 @@
             <a:spLocks noGrp="1"/>
           </p:cNvSpPr>
           <p:nvPr>
-            <p:ph type="body" idx="3" sz="quarter"/>
+            <p:ph type="body" sz="quarter" idx="3"/>
           </p:nvPr>
         </p:nvSpPr>
         <p:spPr/>
@@ -1284,7 +1209,40 @@
           <a:lstStyle/>
           <a:p>
             <a:r>
-              <a:t>This is the exact-synthetic final result. The three model panels are the initial guess on the left, the recovered model in the middle, and the ground truth on the right. The rebar appears as a small high-permittivity inclusion in the concrete; the recovered and ground-truth panels are visually identical because, on the 1 mm grid, they are the same model. The metric tiles below confirm: lateral position 250 mm exactly, depth 89.75 mm (which is the same rasterised cell as 90 mm), radius 6.0 mm exactly, normalised root mean square misfit zero for both the model and the data. The depth reads 89.75 rather than 90.00 because at 1 mm grid resolution several sub-millimetre depth values produce the same rasterised circle. That is a representation detail, not a science result.</a:t>
+              <a:rPr dirty="0"/>
+              <a:t>This is the exact-synthetic final result. The three model panels are the initial guess on the left, the recovered model in the middle, and the ground truth on the right. The rebar appears as a small high-permittivity inclusion in the concrete; the recovered and ground-truth panels are visually identical because, on the 1 mm grid, they are the same model. The metric tiles below confirm: lateral position 250 mm exactly, depth 89.75 mm (which is the same </a:t>
+            </a:r>
+            <a:r>
+              <a:rPr dirty="0" err="1"/>
+              <a:t>rasterised</a:t>
+            </a:r>
+            <a:r>
+              <a:rPr dirty="0"/>
+              <a:t> cell as 90 mm), radius 6.0 mm exactly, </a:t>
+            </a:r>
+            <a:r>
+              <a:rPr dirty="0" err="1"/>
+              <a:t>normalised</a:t>
+            </a:r>
+            <a:r>
+              <a:rPr dirty="0"/>
+              <a:t> root mean square misfit zero for both the model and the data. The depth reads 89.75 rather than 90.00 because at 1 mm grid resolution several sub-</a:t>
+            </a:r>
+            <a:r>
+              <a:rPr dirty="0" err="1"/>
+              <a:t>millimetre</a:t>
+            </a:r>
+            <a:r>
+              <a:rPr dirty="0"/>
+              <a:t> depth values produce the same </a:t>
+            </a:r>
+            <a:r>
+              <a:rPr dirty="0" err="1"/>
+              <a:t>rasterised</a:t>
+            </a:r>
+            <a:r>
+              <a:rPr dirty="0"/>
+              <a:t> circle. That is a representation detail, not a science result.</a:t>
             </a:r>
           </a:p>
         </p:txBody>
@@ -1296,7 +1254,7 @@
             <a:spLocks noGrp="1"/>
           </p:cNvSpPr>
           <p:nvPr>
-            <p:ph type="sldNum" idx="5" sz="quarter"/>
+            <p:ph type="sldNum" sz="quarter" idx="5"/>
           </p:nvPr>
         </p:nvSpPr>
         <p:spPr/>
@@ -1310,7 +1268,7 @@
 </file>
 
 <file path=ppt/notesSlides/notesSlide9.xml><?xml version="1.0" encoding="utf-8"?>
-<p:notes xmlns:a="http://schemas.openxmlformats.org/drawingml/2006/main" xmlns:p="http://schemas.openxmlformats.org/presentationml/2006/main" xmlns:r="http://schemas.openxmlformats.org/officeDocument/2006/relationships">
+<p:notes xmlns:a="http://schemas.openxmlformats.org/drawingml/2006/main" xmlns:r="http://schemas.openxmlformats.org/officeDocument/2006/relationships" xmlns:p="http://schemas.openxmlformats.org/presentationml/2006/main">
   <p:cSld>
     <p:spTree>
       <p:nvGrpSpPr>
@@ -1330,7 +1288,7 @@
         <p:nvSpPr>
           <p:cNvPr id="2" name="Slide Image Placeholder 1"/>
           <p:cNvSpPr>
-            <a:spLocks noGrp="1"/>
+            <a:spLocks noGrp="1" noRot="1" noChangeAspect="1"/>
           </p:cNvSpPr>
           <p:nvPr>
             <p:ph type="sldImg" idx="2"/>
@@ -1345,7 +1303,7 @@
             <a:spLocks noGrp="1"/>
           </p:cNvSpPr>
           <p:nvPr>
-            <p:ph type="body" idx="3" sz="quarter"/>
+            <p:ph type="body" sz="quarter" idx="3"/>
           </p:nvPr>
         </p:nvSpPr>
         <p:spPr/>
@@ -1354,7 +1312,16 @@
           <a:lstStyle/>
           <a:p>
             <a:r>
-              <a:t>These are the two B-scans side by side: observed on the left, recovered from the inverted geometry on the right. Both show the same direct-wave band at the top, the same rebar diffraction hyperbola near 2 nanoseconds, and the same trailing reverberations. The two panels are not just visually similar — the trace-by-trace difference is below the floating-point floor, so the normalised data misfit is exactly zero. This is the strongest possible synthetic recovery signal: on the 1 mm grid, the recovered model is the same model as the truth, not just a close fit. The value of showing both panels is mostly to make the zero-misfit statement visible to the audience.</a:t>
+              <a:rPr dirty="0"/>
+              <a:t>These are the two B-scans side by side: observed on the left, recovered from the inverted geometry on the right. Both show the same direct-wave band at the top, the same rebar diffraction hyperbola near 2 nanoseconds, and the same trailing reverberations. The two panels are not just visually similar — the trace-by-trace difference is below the floating-point floor, so the </a:t>
+            </a:r>
+            <a:r>
+              <a:rPr dirty="0" err="1"/>
+              <a:t>normalised</a:t>
+            </a:r>
+            <a:r>
+              <a:rPr dirty="0"/>
+              <a:t> data misfit is exactly zero. This is the strongest possible synthetic recovery signal: on the 1 mm grid, the recovered model is the same model as the truth, not just a close fit. The value of showing both panels is mostly to make the zero-misfit statement visible to the audience.</a:t>
             </a:r>
           </a:p>
         </p:txBody>
@@ -1366,7 +1333,7 @@
             <a:spLocks noGrp="1"/>
           </p:cNvSpPr>
           <p:nvPr>
-            <p:ph type="sldNum" idx="5" sz="quarter"/>
+            <p:ph type="sldNum" sz="quarter" idx="5"/>
           </p:nvPr>
         </p:nvSpPr>
         <p:spPr/>
@@ -1417,10 +1384,9 @@
           <a:lstStyle/>
           <a:p>
             <a:r>
-              <a:rPr lang="en-US" smtClean="0"/>
+              <a:rPr lang="en-US"/>
               <a:t>Click to edit Master title style</a:t>
             </a:r>
-            <a:endParaRPr lang="en-US"/>
           </a:p>
         </p:txBody>
       </p:sp>
@@ -1536,10 +1502,9 @@
           </a:lstStyle>
           <a:p>
             <a:r>
-              <a:rPr lang="en-US" smtClean="0"/>
+              <a:rPr lang="en-US"/>
               <a:t>Click to edit Master subtitle style</a:t>
             </a:r>
-            <a:endParaRPr lang="en-US"/>
           </a:p>
         </p:txBody>
       </p:sp>
@@ -1560,7 +1525,7 @@
           <a:p>
             <a:fld id="{5BCAD085-E8A6-8845-BD4E-CB4CCA059FC4}" type="datetimeFigureOut">
               <a:rPr lang="en-US" smtClean="0"/>
-              <a:t>1/27/13</a:t>
+              <a:t>5/29/26</a:t>
             </a:fld>
             <a:endParaRPr lang="en-US"/>
           </a:p>
@@ -1654,10 +1619,9 @@
           <a:lstStyle/>
           <a:p>
             <a:r>
-              <a:rPr lang="en-US" smtClean="0"/>
+              <a:rPr lang="en-US"/>
               <a:t>Click to edit Master title style</a:t>
             </a:r>
-            <a:endParaRPr lang="en-US"/>
           </a:p>
         </p:txBody>
       </p:sp>
@@ -1678,38 +1642,37 @@
           <a:p>
             <a:pPr lvl="0"/>
             <a:r>
-              <a:rPr lang="en-US" smtClean="0"/>
+              <a:rPr lang="en-US"/>
               <a:t>Click to edit Master text styles</a:t>
             </a:r>
           </a:p>
           <a:p>
             <a:pPr lvl="1"/>
             <a:r>
-              <a:rPr lang="en-US" smtClean="0"/>
+              <a:rPr lang="en-US"/>
               <a:t>Second level</a:t>
             </a:r>
           </a:p>
           <a:p>
             <a:pPr lvl="2"/>
             <a:r>
-              <a:rPr lang="en-US" smtClean="0"/>
+              <a:rPr lang="en-US"/>
               <a:t>Third level</a:t>
             </a:r>
           </a:p>
           <a:p>
             <a:pPr lvl="3"/>
             <a:r>
-              <a:rPr lang="en-US" smtClean="0"/>
+              <a:rPr lang="en-US"/>
               <a:t>Fourth level</a:t>
             </a:r>
           </a:p>
           <a:p>
             <a:pPr lvl="4"/>
             <a:r>
-              <a:rPr lang="en-US" smtClean="0"/>
+              <a:rPr lang="en-US"/>
               <a:t>Fifth level</a:t>
             </a:r>
-            <a:endParaRPr lang="en-US"/>
           </a:p>
         </p:txBody>
       </p:sp>
@@ -1730,7 +1693,7 @@
           <a:p>
             <a:fld id="{5BCAD085-E8A6-8845-BD4E-CB4CCA059FC4}" type="datetimeFigureOut">
               <a:rPr lang="en-US" smtClean="0"/>
-              <a:t>1/27/13</a:t>
+              <a:t>5/29/26</a:t>
             </a:fld>
             <a:endParaRPr lang="en-US"/>
           </a:p>
@@ -1829,10 +1792,9 @@
           <a:lstStyle/>
           <a:p>
             <a:r>
-              <a:rPr lang="en-US" smtClean="0"/>
+              <a:rPr lang="en-US"/>
               <a:t>Click to edit Master title style</a:t>
             </a:r>
-            <a:endParaRPr lang="en-US"/>
           </a:p>
         </p:txBody>
       </p:sp>
@@ -1858,38 +1820,37 @@
           <a:p>
             <a:pPr lvl="0"/>
             <a:r>
-              <a:rPr lang="en-US" smtClean="0"/>
+              <a:rPr lang="en-US"/>
               <a:t>Click to edit Master text styles</a:t>
             </a:r>
           </a:p>
           <a:p>
             <a:pPr lvl="1"/>
             <a:r>
-              <a:rPr lang="en-US" smtClean="0"/>
+              <a:rPr lang="en-US"/>
               <a:t>Second level</a:t>
             </a:r>
           </a:p>
           <a:p>
             <a:pPr lvl="2"/>
             <a:r>
-              <a:rPr lang="en-US" smtClean="0"/>
+              <a:rPr lang="en-US"/>
               <a:t>Third level</a:t>
             </a:r>
           </a:p>
           <a:p>
             <a:pPr lvl="3"/>
             <a:r>
-              <a:rPr lang="en-US" smtClean="0"/>
+              <a:rPr lang="en-US"/>
               <a:t>Fourth level</a:t>
             </a:r>
           </a:p>
           <a:p>
             <a:pPr lvl="4"/>
             <a:r>
-              <a:rPr lang="en-US" smtClean="0"/>
+              <a:rPr lang="en-US"/>
               <a:t>Fifth level</a:t>
             </a:r>
-            <a:endParaRPr lang="en-US"/>
           </a:p>
         </p:txBody>
       </p:sp>
@@ -1910,7 +1871,7 @@
           <a:p>
             <a:fld id="{5BCAD085-E8A6-8845-BD4E-CB4CCA059FC4}" type="datetimeFigureOut">
               <a:rPr lang="en-US" smtClean="0"/>
-              <a:t>1/27/13</a:t>
+              <a:t>5/29/26</a:t>
             </a:fld>
             <a:endParaRPr lang="en-US"/>
           </a:p>
@@ -2004,10 +1965,9 @@
           <a:lstStyle/>
           <a:p>
             <a:r>
-              <a:rPr lang="en-US" smtClean="0"/>
+              <a:rPr lang="en-US"/>
               <a:t>Click to edit Master title style</a:t>
             </a:r>
-            <a:endParaRPr lang="en-US"/>
           </a:p>
         </p:txBody>
       </p:sp>
@@ -2028,38 +1988,37 @@
           <a:p>
             <a:pPr lvl="0"/>
             <a:r>
-              <a:rPr lang="en-US" smtClean="0"/>
+              <a:rPr lang="en-US"/>
               <a:t>Click to edit Master text styles</a:t>
             </a:r>
           </a:p>
           <a:p>
             <a:pPr lvl="1"/>
             <a:r>
-              <a:rPr lang="en-US" smtClean="0"/>
+              <a:rPr lang="en-US"/>
               <a:t>Second level</a:t>
             </a:r>
           </a:p>
           <a:p>
             <a:pPr lvl="2"/>
             <a:r>
-              <a:rPr lang="en-US" smtClean="0"/>
+              <a:rPr lang="en-US"/>
               <a:t>Third level</a:t>
             </a:r>
           </a:p>
           <a:p>
             <a:pPr lvl="3"/>
             <a:r>
-              <a:rPr lang="en-US" smtClean="0"/>
+              <a:rPr lang="en-US"/>
               <a:t>Fourth level</a:t>
             </a:r>
           </a:p>
           <a:p>
             <a:pPr lvl="4"/>
             <a:r>
-              <a:rPr lang="en-US" smtClean="0"/>
+              <a:rPr lang="en-US"/>
               <a:t>Fifth level</a:t>
             </a:r>
-            <a:endParaRPr lang="en-US"/>
           </a:p>
         </p:txBody>
       </p:sp>
@@ -2080,7 +2039,7 @@
           <a:p>
             <a:fld id="{5BCAD085-E8A6-8845-BD4E-CB4CCA059FC4}" type="datetimeFigureOut">
               <a:rPr lang="en-US" smtClean="0"/>
-              <a:t>1/27/13</a:t>
+              <a:t>5/29/26</a:t>
             </a:fld>
             <a:endParaRPr lang="en-US"/>
           </a:p>
@@ -2183,10 +2142,9 @@
           </a:lstStyle>
           <a:p>
             <a:r>
-              <a:rPr lang="en-US" smtClean="0"/>
+              <a:rPr lang="en-US"/>
               <a:t>Click to edit Master title style</a:t>
             </a:r>
-            <a:endParaRPr lang="en-US"/>
           </a:p>
         </p:txBody>
       </p:sp>
@@ -2303,7 +2261,7 @@
           <a:p>
             <a:pPr lvl="0"/>
             <a:r>
-              <a:rPr lang="en-US" smtClean="0"/>
+              <a:rPr lang="en-US"/>
               <a:t>Click to edit Master text styles</a:t>
             </a:r>
           </a:p>
@@ -2326,7 +2284,7 @@
           <a:p>
             <a:fld id="{5BCAD085-E8A6-8845-BD4E-CB4CCA059FC4}" type="datetimeFigureOut">
               <a:rPr lang="en-US" smtClean="0"/>
-              <a:t>1/27/13</a:t>
+              <a:t>5/29/26</a:t>
             </a:fld>
             <a:endParaRPr lang="en-US"/>
           </a:p>
@@ -2420,10 +2378,9 @@
           <a:lstStyle/>
           <a:p>
             <a:r>
-              <a:rPr lang="en-US" smtClean="0"/>
+              <a:rPr lang="en-US"/>
               <a:t>Click to edit Master title style</a:t>
             </a:r>
-            <a:endParaRPr lang="en-US"/>
           </a:p>
         </p:txBody>
       </p:sp>
@@ -2477,38 +2434,37 @@
           <a:p>
             <a:pPr lvl="0"/>
             <a:r>
-              <a:rPr lang="en-US" smtClean="0"/>
+              <a:rPr lang="en-US"/>
               <a:t>Click to edit Master text styles</a:t>
             </a:r>
           </a:p>
           <a:p>
             <a:pPr lvl="1"/>
             <a:r>
-              <a:rPr lang="en-US" smtClean="0"/>
+              <a:rPr lang="en-US"/>
               <a:t>Second level</a:t>
             </a:r>
           </a:p>
           <a:p>
             <a:pPr lvl="2"/>
             <a:r>
-              <a:rPr lang="en-US" smtClean="0"/>
+              <a:rPr lang="en-US"/>
               <a:t>Third level</a:t>
             </a:r>
           </a:p>
           <a:p>
             <a:pPr lvl="3"/>
             <a:r>
-              <a:rPr lang="en-US" smtClean="0"/>
+              <a:rPr lang="en-US"/>
               <a:t>Fourth level</a:t>
             </a:r>
           </a:p>
           <a:p>
             <a:pPr lvl="4"/>
             <a:r>
-              <a:rPr lang="en-US" smtClean="0"/>
+              <a:rPr lang="en-US"/>
               <a:t>Fifth level</a:t>
             </a:r>
-            <a:endParaRPr lang="en-US"/>
           </a:p>
         </p:txBody>
       </p:sp>
@@ -2562,38 +2518,37 @@
           <a:p>
             <a:pPr lvl="0"/>
             <a:r>
-              <a:rPr lang="en-US" smtClean="0"/>
+              <a:rPr lang="en-US"/>
               <a:t>Click to edit Master text styles</a:t>
             </a:r>
           </a:p>
           <a:p>
             <a:pPr lvl="1"/>
             <a:r>
-              <a:rPr lang="en-US" smtClean="0"/>
+              <a:rPr lang="en-US"/>
               <a:t>Second level</a:t>
             </a:r>
           </a:p>
           <a:p>
             <a:pPr lvl="2"/>
             <a:r>
-              <a:rPr lang="en-US" smtClean="0"/>
+              <a:rPr lang="en-US"/>
               <a:t>Third level</a:t>
             </a:r>
           </a:p>
           <a:p>
             <a:pPr lvl="3"/>
             <a:r>
-              <a:rPr lang="en-US" smtClean="0"/>
+              <a:rPr lang="en-US"/>
               <a:t>Fourth level</a:t>
             </a:r>
           </a:p>
           <a:p>
             <a:pPr lvl="4"/>
             <a:r>
-              <a:rPr lang="en-US" smtClean="0"/>
+              <a:rPr lang="en-US"/>
               <a:t>Fifth level</a:t>
             </a:r>
-            <a:endParaRPr lang="en-US"/>
           </a:p>
         </p:txBody>
       </p:sp>
@@ -2614,7 +2569,7 @@
           <a:p>
             <a:fld id="{5BCAD085-E8A6-8845-BD4E-CB4CCA059FC4}" type="datetimeFigureOut">
               <a:rPr lang="en-US" smtClean="0"/>
-              <a:t>1/27/13</a:t>
+              <a:t>5/29/26</a:t>
             </a:fld>
             <a:endParaRPr lang="en-US"/>
           </a:p>
@@ -2712,10 +2667,9 @@
           </a:lstStyle>
           <a:p>
             <a:r>
-              <a:rPr lang="en-US" smtClean="0"/>
+              <a:rPr lang="en-US"/>
               <a:t>Click to edit Master title style</a:t>
             </a:r>
-            <a:endParaRPr lang="en-US"/>
           </a:p>
         </p:txBody>
       </p:sp>
@@ -2778,7 +2732,7 @@
           <a:p>
             <a:pPr lvl="0"/>
             <a:r>
-              <a:rPr lang="en-US" smtClean="0"/>
+              <a:rPr lang="en-US"/>
               <a:t>Click to edit Master text styles</a:t>
             </a:r>
           </a:p>
@@ -2834,38 +2788,37 @@
           <a:p>
             <a:pPr lvl="0"/>
             <a:r>
-              <a:rPr lang="en-US" smtClean="0"/>
+              <a:rPr lang="en-US"/>
               <a:t>Click to edit Master text styles</a:t>
             </a:r>
           </a:p>
           <a:p>
             <a:pPr lvl="1"/>
             <a:r>
-              <a:rPr lang="en-US" smtClean="0"/>
+              <a:rPr lang="en-US"/>
               <a:t>Second level</a:t>
             </a:r>
           </a:p>
           <a:p>
             <a:pPr lvl="2"/>
             <a:r>
-              <a:rPr lang="en-US" smtClean="0"/>
+              <a:rPr lang="en-US"/>
               <a:t>Third level</a:t>
             </a:r>
           </a:p>
           <a:p>
             <a:pPr lvl="3"/>
             <a:r>
-              <a:rPr lang="en-US" smtClean="0"/>
+              <a:rPr lang="en-US"/>
               <a:t>Fourth level</a:t>
             </a:r>
           </a:p>
           <a:p>
             <a:pPr lvl="4"/>
             <a:r>
-              <a:rPr lang="en-US" smtClean="0"/>
+              <a:rPr lang="en-US"/>
               <a:t>Fifth level</a:t>
             </a:r>
-            <a:endParaRPr lang="en-US"/>
           </a:p>
         </p:txBody>
       </p:sp>
@@ -2928,7 +2881,7 @@
           <a:p>
             <a:pPr lvl="0"/>
             <a:r>
-              <a:rPr lang="en-US" smtClean="0"/>
+              <a:rPr lang="en-US"/>
               <a:t>Click to edit Master text styles</a:t>
             </a:r>
           </a:p>
@@ -2984,38 +2937,37 @@
           <a:p>
             <a:pPr lvl="0"/>
             <a:r>
-              <a:rPr lang="en-US" smtClean="0"/>
+              <a:rPr lang="en-US"/>
               <a:t>Click to edit Master text styles</a:t>
             </a:r>
           </a:p>
           <a:p>
             <a:pPr lvl="1"/>
             <a:r>
-              <a:rPr lang="en-US" smtClean="0"/>
+              <a:rPr lang="en-US"/>
               <a:t>Second level</a:t>
             </a:r>
           </a:p>
           <a:p>
             <a:pPr lvl="2"/>
             <a:r>
-              <a:rPr lang="en-US" smtClean="0"/>
+              <a:rPr lang="en-US"/>
               <a:t>Third level</a:t>
             </a:r>
           </a:p>
           <a:p>
             <a:pPr lvl="3"/>
             <a:r>
-              <a:rPr lang="en-US" smtClean="0"/>
+              <a:rPr lang="en-US"/>
               <a:t>Fourth level</a:t>
             </a:r>
           </a:p>
           <a:p>
             <a:pPr lvl="4"/>
             <a:r>
-              <a:rPr lang="en-US" smtClean="0"/>
+              <a:rPr lang="en-US"/>
               <a:t>Fifth level</a:t>
             </a:r>
-            <a:endParaRPr lang="en-US"/>
           </a:p>
         </p:txBody>
       </p:sp>
@@ -3036,7 +2988,7 @@
           <a:p>
             <a:fld id="{5BCAD085-E8A6-8845-BD4E-CB4CCA059FC4}" type="datetimeFigureOut">
               <a:rPr lang="en-US" smtClean="0"/>
-              <a:t>1/27/13</a:t>
+              <a:t>5/29/26</a:t>
             </a:fld>
             <a:endParaRPr lang="en-US"/>
           </a:p>
@@ -3130,10 +3082,9 @@
           <a:lstStyle/>
           <a:p>
             <a:r>
-              <a:rPr lang="en-US" smtClean="0"/>
+              <a:rPr lang="en-US"/>
               <a:t>Click to edit Master title style</a:t>
             </a:r>
-            <a:endParaRPr lang="en-US"/>
           </a:p>
         </p:txBody>
       </p:sp>
@@ -3154,7 +3105,7 @@
           <a:p>
             <a:fld id="{5BCAD085-E8A6-8845-BD4E-CB4CCA059FC4}" type="datetimeFigureOut">
               <a:rPr lang="en-US" smtClean="0"/>
-              <a:t>1/27/13</a:t>
+              <a:t>5/29/26</a:t>
             </a:fld>
             <a:endParaRPr lang="en-US"/>
           </a:p>
@@ -3249,7 +3200,7 @@
           <a:p>
             <a:fld id="{5BCAD085-E8A6-8845-BD4E-CB4CCA059FC4}" type="datetimeFigureOut">
               <a:rPr lang="en-US" smtClean="0"/>
-              <a:t>1/27/13</a:t>
+              <a:t>5/29/26</a:t>
             </a:fld>
             <a:endParaRPr lang="en-US"/>
           </a:p>
@@ -3352,10 +3303,9 @@
           </a:lstStyle>
           <a:p>
             <a:r>
-              <a:rPr lang="en-US" smtClean="0"/>
+              <a:rPr lang="en-US"/>
               <a:t>Click to edit Master title style</a:t>
             </a:r>
-            <a:endParaRPr lang="en-US"/>
           </a:p>
         </p:txBody>
       </p:sp>
@@ -3409,38 +3359,37 @@
           <a:p>
             <a:pPr lvl="0"/>
             <a:r>
-              <a:rPr lang="en-US" smtClean="0"/>
+              <a:rPr lang="en-US"/>
               <a:t>Click to edit Master text styles</a:t>
             </a:r>
           </a:p>
           <a:p>
             <a:pPr lvl="1"/>
             <a:r>
-              <a:rPr lang="en-US" smtClean="0"/>
+              <a:rPr lang="en-US"/>
               <a:t>Second level</a:t>
             </a:r>
           </a:p>
           <a:p>
             <a:pPr lvl="2"/>
             <a:r>
-              <a:rPr lang="en-US" smtClean="0"/>
+              <a:rPr lang="en-US"/>
               <a:t>Third level</a:t>
             </a:r>
           </a:p>
           <a:p>
             <a:pPr lvl="3"/>
             <a:r>
-              <a:rPr lang="en-US" smtClean="0"/>
+              <a:rPr lang="en-US"/>
               <a:t>Fourth level</a:t>
             </a:r>
           </a:p>
           <a:p>
             <a:pPr lvl="4"/>
             <a:r>
-              <a:rPr lang="en-US" smtClean="0"/>
+              <a:rPr lang="en-US"/>
               <a:t>Fifth level</a:t>
             </a:r>
-            <a:endParaRPr lang="en-US"/>
           </a:p>
         </p:txBody>
       </p:sp>
@@ -3503,7 +3452,7 @@
           <a:p>
             <a:pPr lvl="0"/>
             <a:r>
-              <a:rPr lang="en-US" smtClean="0"/>
+              <a:rPr lang="en-US"/>
               <a:t>Click to edit Master text styles</a:t>
             </a:r>
           </a:p>
@@ -3526,7 +3475,7 @@
           <a:p>
             <a:fld id="{5BCAD085-E8A6-8845-BD4E-CB4CCA059FC4}" type="datetimeFigureOut">
               <a:rPr lang="en-US" smtClean="0"/>
-              <a:t>1/27/13</a:t>
+              <a:t>5/29/26</a:t>
             </a:fld>
             <a:endParaRPr lang="en-US"/>
           </a:p>
@@ -3629,10 +3578,9 @@
           </a:lstStyle>
           <a:p>
             <a:r>
-              <a:rPr lang="en-US" smtClean="0"/>
+              <a:rPr lang="en-US"/>
               <a:t>Click to edit Master title style</a:t>
             </a:r>
-            <a:endParaRPr lang="en-US"/>
           </a:p>
         </p:txBody>
       </p:sp>
@@ -3756,7 +3704,7 @@
           <a:p>
             <a:pPr lvl="0"/>
             <a:r>
-              <a:rPr lang="en-US" smtClean="0"/>
+              <a:rPr lang="en-US"/>
               <a:t>Click to edit Master text styles</a:t>
             </a:r>
           </a:p>
@@ -3779,7 +3727,7 @@
           <a:p>
             <a:fld id="{5BCAD085-E8A6-8845-BD4E-CB4CCA059FC4}" type="datetimeFigureOut">
               <a:rPr lang="en-US" smtClean="0"/>
-              <a:t>1/27/13</a:t>
+              <a:t>5/29/26</a:t>
             </a:fld>
             <a:endParaRPr lang="en-US"/>
           </a:p>
@@ -3888,10 +3836,9 @@
           <a:lstStyle/>
           <a:p>
             <a:r>
-              <a:rPr lang="en-US" smtClean="0"/>
+              <a:rPr lang="en-US"/>
               <a:t>Click to edit Master title style</a:t>
             </a:r>
-            <a:endParaRPr lang="en-US"/>
           </a:p>
         </p:txBody>
       </p:sp>
@@ -3922,38 +3869,37 @@
           <a:p>
             <a:pPr lvl="0"/>
             <a:r>
-              <a:rPr lang="en-US" smtClean="0"/>
+              <a:rPr lang="en-US"/>
               <a:t>Click to edit Master text styles</a:t>
             </a:r>
           </a:p>
           <a:p>
             <a:pPr lvl="1"/>
             <a:r>
-              <a:rPr lang="en-US" smtClean="0"/>
+              <a:rPr lang="en-US"/>
               <a:t>Second level</a:t>
             </a:r>
           </a:p>
           <a:p>
             <a:pPr lvl="2"/>
             <a:r>
-              <a:rPr lang="en-US" smtClean="0"/>
+              <a:rPr lang="en-US"/>
               <a:t>Third level</a:t>
             </a:r>
           </a:p>
           <a:p>
             <a:pPr lvl="3"/>
             <a:r>
-              <a:rPr lang="en-US" smtClean="0"/>
+              <a:rPr lang="en-US"/>
               <a:t>Fourth level</a:t>
             </a:r>
           </a:p>
           <a:p>
             <a:pPr lvl="4"/>
             <a:r>
-              <a:rPr lang="en-US" smtClean="0"/>
+              <a:rPr lang="en-US"/>
               <a:t>Fifth level</a:t>
             </a:r>
-            <a:endParaRPr lang="en-US"/>
           </a:p>
         </p:txBody>
       </p:sp>
@@ -3992,7 +3938,7 @@
           <a:p>
             <a:fld id="{5BCAD085-E8A6-8845-BD4E-CB4CCA059FC4}" type="datetimeFigureOut">
               <a:rPr lang="en-US" smtClean="0"/>
-              <a:t>1/27/13</a:t>
+              <a:t>5/29/26</a:t>
             </a:fld>
             <a:endParaRPr lang="en-US"/>
           </a:p>
@@ -4351,7 +4297,7 @@
 </file>
 
 <file path=ppt/slides/slide1.xml><?xml version="1.0" encoding="utf-8"?>
-<p:sld xmlns:a="http://schemas.openxmlformats.org/drawingml/2006/main" xmlns:p="http://schemas.openxmlformats.org/presentationml/2006/main" xmlns:r="http://schemas.openxmlformats.org/officeDocument/2006/relationships">
+<p:sld xmlns:a="http://schemas.openxmlformats.org/drawingml/2006/main" xmlns:r="http://schemas.openxmlformats.org/officeDocument/2006/relationships" xmlns:p="http://schemas.openxmlformats.org/presentationml/2006/main">
   <p:cSld>
     <p:bg>
       <p:bgPr>
@@ -4367,7 +4313,14 @@
         <p:cNvGrpSpPr/>
         <p:nvPr/>
       </p:nvGrpSpPr>
-      <p:grpSpPr/>
+      <p:grpSpPr>
+        <a:xfrm>
+          <a:off x="0" y="0"/>
+          <a:ext cx="0" cy="0"/>
+          <a:chOff x="0" y="0"/>
+          <a:chExt cx="0" cy="0"/>
+        </a:xfrm>
+      </p:grpSpPr>
       <p:sp>
         <p:nvSpPr>
           <p:cNvPr id="2" name="Rectangle 1"/>
@@ -4408,6 +4361,7 @@
           <a:lstStyle/>
           <a:p>
             <a:pPr algn="ctr"/>
+            <a:endParaRPr/>
           </a:p>
         </p:txBody>
       </p:sp>
@@ -4451,6 +4405,7 @@
           <a:lstStyle/>
           <a:p>
             <a:pPr algn="ctr"/>
+            <a:endParaRPr/>
           </a:p>
         </p:txBody>
       </p:sp>
@@ -4602,7 +4557,9 @@
         <p:txBody>
           <a:bodyPr rtlCol="0" anchor="ctr"/>
           <a:lstStyle/>
-          <a:p/>
+          <a:p>
+            <a:endParaRPr/>
+          </a:p>
         </p:txBody>
       </p:sp>
       <p:sp>
@@ -4717,7 +4674,9 @@
         <p:txBody>
           <a:bodyPr rtlCol="0" anchor="ctr"/>
           <a:lstStyle/>
-          <a:p/>
+          <a:p>
+            <a:endParaRPr/>
+          </a:p>
         </p:txBody>
       </p:sp>
       <p:sp>
@@ -4832,7 +4791,9 @@
         <p:txBody>
           <a:bodyPr rtlCol="0" anchor="ctr"/>
           <a:lstStyle/>
-          <a:p/>
+          <a:p>
+            <a:endParaRPr/>
+          </a:p>
         </p:txBody>
       </p:sp>
       <p:sp>
@@ -4988,7 +4949,7 @@
 </file>
 
 <file path=ppt/slides/slide10.xml><?xml version="1.0" encoding="utf-8"?>
-<p:sld xmlns:a="http://schemas.openxmlformats.org/drawingml/2006/main" xmlns:p="http://schemas.openxmlformats.org/presentationml/2006/main" xmlns:r="http://schemas.openxmlformats.org/officeDocument/2006/relationships">
+<p:sld xmlns:a="http://schemas.openxmlformats.org/drawingml/2006/main" xmlns:r="http://schemas.openxmlformats.org/officeDocument/2006/relationships" xmlns:p="http://schemas.openxmlformats.org/presentationml/2006/main">
   <p:cSld>
     <p:spTree>
       <p:nvGrpSpPr>
@@ -4996,7 +4957,14 @@
         <p:cNvGrpSpPr/>
         <p:nvPr/>
       </p:nvGrpSpPr>
-      <p:grpSpPr/>
+      <p:grpSpPr>
+        <a:xfrm>
+          <a:off x="0" y="0"/>
+          <a:ext cx="0" cy="0"/>
+          <a:chOff x="0" y="0"/>
+          <a:chExt cx="0" cy="0"/>
+        </a:xfrm>
+      </p:grpSpPr>
       <p:sp>
         <p:nvSpPr>
           <p:cNvPr id="2" name="Rectangle 1"/>
@@ -5037,6 +5005,7 @@
           <a:lstStyle/>
           <a:p>
             <a:pPr algn="ctr"/>
+            <a:endParaRPr/>
           </a:p>
         </p:txBody>
       </p:sp>
@@ -5116,6 +5085,7 @@
           <a:lstStyle/>
           <a:p>
             <a:pPr algn="ctr"/>
+            <a:endParaRPr/>
           </a:p>
         </p:txBody>
       </p:sp>
@@ -5200,7 +5170,7 @@
           <p:nvPr/>
         </p:nvPicPr>
         <p:blipFill>
-          <a:blip r:embed="rId2"/>
+          <a:blip r:embed="rId3"/>
           <a:stretch>
             <a:fillRect/>
           </a:stretch>
@@ -5224,7 +5194,7 @@
           <p:nvPr/>
         </p:nvPicPr>
         <p:blipFill>
-          <a:blip r:embed="rId3"/>
+          <a:blip r:embed="rId4"/>
           <a:stretch>
             <a:fillRect/>
           </a:stretch>
@@ -5356,7 +5326,7 @@
 </file>
 
 <file path=ppt/slides/slide11.xml><?xml version="1.0" encoding="utf-8"?>
-<p:sld xmlns:a="http://schemas.openxmlformats.org/drawingml/2006/main" xmlns:p="http://schemas.openxmlformats.org/presentationml/2006/main" xmlns:r="http://schemas.openxmlformats.org/officeDocument/2006/relationships">
+<p:sld xmlns:a="http://schemas.openxmlformats.org/drawingml/2006/main" xmlns:r="http://schemas.openxmlformats.org/officeDocument/2006/relationships" xmlns:p="http://schemas.openxmlformats.org/presentationml/2006/main">
   <p:cSld>
     <p:spTree>
       <p:nvGrpSpPr>
@@ -5364,7 +5334,14 @@
         <p:cNvGrpSpPr/>
         <p:nvPr/>
       </p:nvGrpSpPr>
-      <p:grpSpPr/>
+      <p:grpSpPr>
+        <a:xfrm>
+          <a:off x="0" y="0"/>
+          <a:ext cx="0" cy="0"/>
+          <a:chOff x="0" y="0"/>
+          <a:chExt cx="0" cy="0"/>
+        </a:xfrm>
+      </p:grpSpPr>
       <p:sp>
         <p:nvSpPr>
           <p:cNvPr id="2" name="Rectangle 1"/>
@@ -5405,6 +5382,7 @@
           <a:lstStyle/>
           <a:p>
             <a:pPr algn="ctr"/>
+            <a:endParaRPr/>
           </a:p>
         </p:txBody>
       </p:sp>
@@ -5484,6 +5462,7 @@
           <a:lstStyle/>
           <a:p>
             <a:pPr algn="ctr"/>
+            <a:endParaRPr/>
           </a:p>
         </p:txBody>
       </p:sp>
@@ -5568,7 +5547,7 @@
           <p:nvPr/>
         </p:nvPicPr>
         <p:blipFill>
-          <a:blip r:embed="rId2"/>
+          <a:blip r:embed="rId3"/>
           <a:stretch>
             <a:fillRect/>
           </a:stretch>
@@ -5628,7 +5607,7 @@
 </file>
 
 <file path=ppt/slides/slide12.xml><?xml version="1.0" encoding="utf-8"?>
-<p:sld xmlns:a="http://schemas.openxmlformats.org/drawingml/2006/main" xmlns:p="http://schemas.openxmlformats.org/presentationml/2006/main" xmlns:r="http://schemas.openxmlformats.org/officeDocument/2006/relationships">
+<p:sld xmlns:a="http://schemas.openxmlformats.org/drawingml/2006/main" xmlns:r="http://schemas.openxmlformats.org/officeDocument/2006/relationships" xmlns:p="http://schemas.openxmlformats.org/presentationml/2006/main">
   <p:cSld>
     <p:spTree>
       <p:nvGrpSpPr>
@@ -5636,7 +5615,14 @@
         <p:cNvGrpSpPr/>
         <p:nvPr/>
       </p:nvGrpSpPr>
-      <p:grpSpPr/>
+      <p:grpSpPr>
+        <a:xfrm>
+          <a:off x="0" y="0"/>
+          <a:ext cx="0" cy="0"/>
+          <a:chOff x="0" y="0"/>
+          <a:chExt cx="0" cy="0"/>
+        </a:xfrm>
+      </p:grpSpPr>
       <p:sp>
         <p:nvSpPr>
           <p:cNvPr id="2" name="Rectangle 1"/>
@@ -5677,6 +5663,7 @@
           <a:lstStyle/>
           <a:p>
             <a:pPr algn="ctr"/>
+            <a:endParaRPr/>
           </a:p>
         </p:txBody>
       </p:sp>
@@ -5756,6 +5743,7 @@
           <a:lstStyle/>
           <a:p>
             <a:pPr algn="ctr"/>
+            <a:endParaRPr/>
           </a:p>
         </p:txBody>
       </p:sp>
@@ -5840,7 +5828,7 @@
           <p:nvPr/>
         </p:nvPicPr>
         <p:blipFill>
-          <a:blip r:embed="rId2"/>
+          <a:blip r:embed="rId3"/>
           <a:stretch>
             <a:fillRect/>
           </a:stretch>
@@ -5900,7 +5888,7 @@
 </file>
 
 <file path=ppt/slides/slide13.xml><?xml version="1.0" encoding="utf-8"?>
-<p:sld xmlns:a="http://schemas.openxmlformats.org/drawingml/2006/main" xmlns:p="http://schemas.openxmlformats.org/presentationml/2006/main" xmlns:r="http://schemas.openxmlformats.org/officeDocument/2006/relationships">
+<p:sld xmlns:a="http://schemas.openxmlformats.org/drawingml/2006/main" xmlns:r="http://schemas.openxmlformats.org/officeDocument/2006/relationships" xmlns:p="http://schemas.openxmlformats.org/presentationml/2006/main">
   <p:cSld>
     <p:spTree>
       <p:nvGrpSpPr>
@@ -5908,7 +5896,14 @@
         <p:cNvGrpSpPr/>
         <p:nvPr/>
       </p:nvGrpSpPr>
-      <p:grpSpPr/>
+      <p:grpSpPr>
+        <a:xfrm>
+          <a:off x="0" y="0"/>
+          <a:ext cx="0" cy="0"/>
+          <a:chOff x="0" y="0"/>
+          <a:chExt cx="0" cy="0"/>
+        </a:xfrm>
+      </p:grpSpPr>
       <p:sp>
         <p:nvSpPr>
           <p:cNvPr id="2" name="Rectangle 1"/>
@@ -5949,6 +5944,7 @@
           <a:lstStyle/>
           <a:p>
             <a:pPr algn="ctr"/>
+            <a:endParaRPr/>
           </a:p>
         </p:txBody>
       </p:sp>
@@ -5961,7 +5957,7 @@
         <p:spPr>
           <a:xfrm>
             <a:off x="640080" y="201168"/>
-            <a:ext cx="10972800" cy="640080"/>
+            <a:ext cx="10972800" cy="523220"/>
           </a:xfrm>
           <a:prstGeom prst="rect">
             <a:avLst/>
@@ -5983,8 +5979,10 @@
               </a:defRPr>
             </a:pPr>
             <a:r>
-              <a:t>What comes next</a:t>
-            </a:r>
+              <a:rPr lang="en-US" dirty="0"/>
+              <a:t>Current Plan</a:t>
+            </a:r>
+            <a:endParaRPr dirty="0"/>
           </a:p>
         </p:txBody>
       </p:sp>
@@ -6028,6 +6026,7 @@
           <a:lstStyle/>
           <a:p>
             <a:pPr algn="ctr"/>
+            <a:endParaRPr/>
           </a:p>
         </p:txBody>
       </p:sp>
@@ -6143,7 +6142,9 @@
         <p:txBody>
           <a:bodyPr rtlCol="0" anchor="ctr"/>
           <a:lstStyle/>
-          <a:p/>
+          <a:p>
+            <a:endParaRPr/>
+          </a:p>
         </p:txBody>
       </p:sp>
       <p:sp>
@@ -6258,7 +6259,9 @@
         <p:txBody>
           <a:bodyPr rtlCol="0" anchor="ctr"/>
           <a:lstStyle/>
-          <a:p/>
+          <a:p>
+            <a:endParaRPr/>
+          </a:p>
         </p:txBody>
       </p:sp>
       <p:sp>
@@ -6373,7 +6376,9 @@
         <p:txBody>
           <a:bodyPr rtlCol="0" anchor="ctr"/>
           <a:lstStyle/>
-          <a:p/>
+          <a:p>
+            <a:endParaRPr/>
+          </a:p>
         </p:txBody>
       </p:sp>
       <p:sp>
@@ -6493,7 +6498,7 @@
 </file>
 
 <file path=ppt/slides/slide2.xml><?xml version="1.0" encoding="utf-8"?>
-<p:sld xmlns:a="http://schemas.openxmlformats.org/drawingml/2006/main" xmlns:p="http://schemas.openxmlformats.org/presentationml/2006/main" xmlns:r="http://schemas.openxmlformats.org/officeDocument/2006/relationships">
+<p:sld xmlns:a="http://schemas.openxmlformats.org/drawingml/2006/main" xmlns:r="http://schemas.openxmlformats.org/officeDocument/2006/relationships" xmlns:p="http://schemas.openxmlformats.org/presentationml/2006/main">
   <p:cSld>
     <p:spTree>
       <p:nvGrpSpPr>
@@ -6501,7 +6506,14 @@
         <p:cNvGrpSpPr/>
         <p:nvPr/>
       </p:nvGrpSpPr>
-      <p:grpSpPr/>
+      <p:grpSpPr>
+        <a:xfrm>
+          <a:off x="0" y="0"/>
+          <a:ext cx="0" cy="0"/>
+          <a:chOff x="0" y="0"/>
+          <a:chExt cx="0" cy="0"/>
+        </a:xfrm>
+      </p:grpSpPr>
       <p:sp>
         <p:nvSpPr>
           <p:cNvPr id="2" name="Rectangle 1"/>
@@ -6542,6 +6554,7 @@
           <a:lstStyle/>
           <a:p>
             <a:pPr algn="ctr"/>
+            <a:endParaRPr/>
           </a:p>
         </p:txBody>
       </p:sp>
@@ -6621,6 +6634,7 @@
           <a:lstStyle/>
           <a:p>
             <a:pPr algn="ctr"/>
+            <a:endParaRPr/>
           </a:p>
         </p:txBody>
       </p:sp>
@@ -6871,7 +6885,9 @@
         <p:txBody>
           <a:bodyPr rtlCol="0" anchor="ctr"/>
           <a:lstStyle/>
-          <a:p/>
+          <a:p>
+            <a:endParaRPr/>
+          </a:p>
         </p:txBody>
       </p:sp>
       <p:sp>
@@ -7111,7 +7127,7 @@
 </file>
 
 <file path=ppt/slides/slide3.xml><?xml version="1.0" encoding="utf-8"?>
-<p:sld xmlns:a="http://schemas.openxmlformats.org/drawingml/2006/main" xmlns:p="http://schemas.openxmlformats.org/presentationml/2006/main" xmlns:r="http://schemas.openxmlformats.org/officeDocument/2006/relationships">
+<p:sld xmlns:a="http://schemas.openxmlformats.org/drawingml/2006/main" xmlns:r="http://schemas.openxmlformats.org/officeDocument/2006/relationships" xmlns:p="http://schemas.openxmlformats.org/presentationml/2006/main">
   <p:cSld>
     <p:spTree>
       <p:nvGrpSpPr>
@@ -7119,7 +7135,14 @@
         <p:cNvGrpSpPr/>
         <p:nvPr/>
       </p:nvGrpSpPr>
-      <p:grpSpPr/>
+      <p:grpSpPr>
+        <a:xfrm>
+          <a:off x="0" y="0"/>
+          <a:ext cx="0" cy="0"/>
+          <a:chOff x="0" y="0"/>
+          <a:chExt cx="0" cy="0"/>
+        </a:xfrm>
+      </p:grpSpPr>
       <p:sp>
         <p:nvSpPr>
           <p:cNvPr id="2" name="Rectangle 1"/>
@@ -7160,6 +7183,7 @@
           <a:lstStyle/>
           <a:p>
             <a:pPr algn="ctr"/>
+            <a:endParaRPr/>
           </a:p>
         </p:txBody>
       </p:sp>
@@ -7239,6 +7263,7 @@
           <a:lstStyle/>
           <a:p>
             <a:pPr algn="ctr"/>
+            <a:endParaRPr/>
           </a:p>
         </p:txBody>
       </p:sp>
@@ -7323,7 +7348,7 @@
           <p:nvPr/>
         </p:nvPicPr>
         <p:blipFill>
-          <a:blip r:embed="rId2"/>
+          <a:blip r:embed="rId3"/>
           <a:stretch>
             <a:fillRect/>
           </a:stretch>
@@ -7383,7 +7408,7 @@
 </file>
 
 <file path=ppt/slides/slide4.xml><?xml version="1.0" encoding="utf-8"?>
-<p:sld xmlns:a="http://schemas.openxmlformats.org/drawingml/2006/main" xmlns:p="http://schemas.openxmlformats.org/presentationml/2006/main" xmlns:r="http://schemas.openxmlformats.org/officeDocument/2006/relationships">
+<p:sld xmlns:a="http://schemas.openxmlformats.org/drawingml/2006/main" xmlns:r="http://schemas.openxmlformats.org/officeDocument/2006/relationships" xmlns:p="http://schemas.openxmlformats.org/presentationml/2006/main">
   <p:cSld>
     <p:spTree>
       <p:nvGrpSpPr>
@@ -7391,7 +7416,14 @@
         <p:cNvGrpSpPr/>
         <p:nvPr/>
       </p:nvGrpSpPr>
-      <p:grpSpPr/>
+      <p:grpSpPr>
+        <a:xfrm>
+          <a:off x="0" y="0"/>
+          <a:ext cx="0" cy="0"/>
+          <a:chOff x="0" y="0"/>
+          <a:chExt cx="0" cy="0"/>
+        </a:xfrm>
+      </p:grpSpPr>
       <p:sp>
         <p:nvSpPr>
           <p:cNvPr id="2" name="Rectangle 1"/>
@@ -7432,6 +7464,7 @@
           <a:lstStyle/>
           <a:p>
             <a:pPr algn="ctr"/>
+            <a:endParaRPr/>
           </a:p>
         </p:txBody>
       </p:sp>
@@ -7511,6 +7544,7 @@
           <a:lstStyle/>
           <a:p>
             <a:pPr algn="ctr"/>
+            <a:endParaRPr/>
           </a:p>
         </p:txBody>
       </p:sp>
@@ -7682,7 +7716,7 @@
           <p:nvPr/>
         </p:nvPicPr>
         <p:blipFill>
-          <a:blip r:embed="rId2"/>
+          <a:blip r:embed="rId3"/>
           <a:stretch>
             <a:fillRect/>
           </a:stretch>
@@ -7742,7 +7776,7 @@
 </file>
 
 <file path=ppt/slides/slide5.xml><?xml version="1.0" encoding="utf-8"?>
-<p:sld xmlns:a="http://schemas.openxmlformats.org/drawingml/2006/main" xmlns:p="http://schemas.openxmlformats.org/presentationml/2006/main" xmlns:r="http://schemas.openxmlformats.org/officeDocument/2006/relationships">
+<p:sld xmlns:a="http://schemas.openxmlformats.org/drawingml/2006/main" xmlns:r="http://schemas.openxmlformats.org/officeDocument/2006/relationships" xmlns:p="http://schemas.openxmlformats.org/presentationml/2006/main">
   <p:cSld>
     <p:spTree>
       <p:nvGrpSpPr>
@@ -7750,7 +7784,14 @@
         <p:cNvGrpSpPr/>
         <p:nvPr/>
       </p:nvGrpSpPr>
-      <p:grpSpPr/>
+      <p:grpSpPr>
+        <a:xfrm>
+          <a:off x="0" y="0"/>
+          <a:ext cx="0" cy="0"/>
+          <a:chOff x="0" y="0"/>
+          <a:chExt cx="0" cy="0"/>
+        </a:xfrm>
+      </p:grpSpPr>
       <p:sp>
         <p:nvSpPr>
           <p:cNvPr id="2" name="Rectangle 1"/>
@@ -7791,6 +7832,7 @@
           <a:lstStyle/>
           <a:p>
             <a:pPr algn="ctr"/>
+            <a:endParaRPr/>
           </a:p>
         </p:txBody>
       </p:sp>
@@ -7870,6 +7912,7 @@
           <a:lstStyle/>
           <a:p>
             <a:pPr algn="ctr"/>
+            <a:endParaRPr/>
           </a:p>
         </p:txBody>
       </p:sp>
@@ -7954,7 +7997,7 @@
           <p:nvPr/>
         </p:nvPicPr>
         <p:blipFill>
-          <a:blip r:embed="rId2"/>
+          <a:blip r:embed="rId3"/>
           <a:stretch>
             <a:fillRect/>
           </a:stretch>
@@ -8050,7 +8093,7 @@
 </file>
 
 <file path=ppt/slides/slide6.xml><?xml version="1.0" encoding="utf-8"?>
-<p:sld xmlns:a="http://schemas.openxmlformats.org/drawingml/2006/main" xmlns:p="http://schemas.openxmlformats.org/presentationml/2006/main" xmlns:r="http://schemas.openxmlformats.org/officeDocument/2006/relationships">
+<p:sld xmlns:a="http://schemas.openxmlformats.org/drawingml/2006/main" xmlns:r="http://schemas.openxmlformats.org/officeDocument/2006/relationships" xmlns:p="http://schemas.openxmlformats.org/presentationml/2006/main">
   <p:cSld>
     <p:spTree>
       <p:nvGrpSpPr>
@@ -8058,7 +8101,14 @@
         <p:cNvGrpSpPr/>
         <p:nvPr/>
       </p:nvGrpSpPr>
-      <p:grpSpPr/>
+      <p:grpSpPr>
+        <a:xfrm>
+          <a:off x="0" y="0"/>
+          <a:ext cx="0" cy="0"/>
+          <a:chOff x="0" y="0"/>
+          <a:chExt cx="0" cy="0"/>
+        </a:xfrm>
+      </p:grpSpPr>
       <p:sp>
         <p:nvSpPr>
           <p:cNvPr id="2" name="Rectangle 1"/>
@@ -8099,6 +8149,7 @@
           <a:lstStyle/>
           <a:p>
             <a:pPr algn="ctr"/>
+            <a:endParaRPr/>
           </a:p>
         </p:txBody>
       </p:sp>
@@ -8178,6 +8229,7 @@
           <a:lstStyle/>
           <a:p>
             <a:pPr algn="ctr"/>
+            <a:endParaRPr/>
           </a:p>
         </p:txBody>
       </p:sp>
@@ -8293,7 +8345,9 @@
         <p:txBody>
           <a:bodyPr rtlCol="0" anchor="ctr"/>
           <a:lstStyle/>
-          <a:p/>
+          <a:p>
+            <a:endParaRPr/>
+          </a:p>
         </p:txBody>
       </p:sp>
       <p:sp>
@@ -8416,7 +8470,9 @@
         <p:txBody>
           <a:bodyPr rtlCol="0" anchor="ctr"/>
           <a:lstStyle/>
-          <a:p/>
+          <a:p>
+            <a:endParaRPr/>
+          </a:p>
         </p:txBody>
       </p:sp>
       <p:sp>
@@ -8539,7 +8595,9 @@
         <p:txBody>
           <a:bodyPr rtlCol="0" anchor="ctr"/>
           <a:lstStyle/>
-          <a:p/>
+          <a:p>
+            <a:endParaRPr/>
+          </a:p>
         </p:txBody>
       </p:sp>
       <p:sp>
@@ -8702,7 +8760,7 @@
 </file>
 
 <file path=ppt/slides/slide7.xml><?xml version="1.0" encoding="utf-8"?>
-<p:sld xmlns:a="http://schemas.openxmlformats.org/drawingml/2006/main" xmlns:p="http://schemas.openxmlformats.org/presentationml/2006/main" xmlns:r="http://schemas.openxmlformats.org/officeDocument/2006/relationships">
+<p:sld xmlns:a="http://schemas.openxmlformats.org/drawingml/2006/main" xmlns:r="http://schemas.openxmlformats.org/officeDocument/2006/relationships" xmlns:p="http://schemas.openxmlformats.org/presentationml/2006/main">
   <p:cSld>
     <p:spTree>
       <p:nvGrpSpPr>
@@ -8710,7 +8768,14 @@
         <p:cNvGrpSpPr/>
         <p:nvPr/>
       </p:nvGrpSpPr>
-      <p:grpSpPr/>
+      <p:grpSpPr>
+        <a:xfrm>
+          <a:off x="0" y="0"/>
+          <a:ext cx="0" cy="0"/>
+          <a:chOff x="0" y="0"/>
+          <a:chExt cx="0" cy="0"/>
+        </a:xfrm>
+      </p:grpSpPr>
       <p:sp>
         <p:nvSpPr>
           <p:cNvPr id="2" name="Rectangle 1"/>
@@ -8751,6 +8816,7 @@
           <a:lstStyle/>
           <a:p>
             <a:pPr algn="ctr"/>
+            <a:endParaRPr/>
           </a:p>
         </p:txBody>
       </p:sp>
@@ -8830,6 +8896,7 @@
           <a:lstStyle/>
           <a:p>
             <a:pPr algn="ctr"/>
+            <a:endParaRPr/>
           </a:p>
         </p:txBody>
       </p:sp>
@@ -9032,7 +9099,9 @@
         <p:txBody>
           <a:bodyPr rtlCol="0" anchor="ctr"/>
           <a:lstStyle/>
-          <a:p/>
+          <a:p>
+            <a:endParaRPr/>
+          </a:p>
         </p:txBody>
       </p:sp>
       <p:sp>
@@ -9151,7 +9220,9 @@
         <p:txBody>
           <a:bodyPr rtlCol="0" anchor="ctr"/>
           <a:lstStyle/>
-          <a:p/>
+          <a:p>
+            <a:endParaRPr/>
+          </a:p>
         </p:txBody>
       </p:sp>
       <p:sp>
@@ -9239,7 +9310,7 @@
 </file>
 
 <file path=ppt/slides/slide8.xml><?xml version="1.0" encoding="utf-8"?>
-<p:sld xmlns:a="http://schemas.openxmlformats.org/drawingml/2006/main" xmlns:p="http://schemas.openxmlformats.org/presentationml/2006/main" xmlns:r="http://schemas.openxmlformats.org/officeDocument/2006/relationships">
+<p:sld xmlns:a="http://schemas.openxmlformats.org/drawingml/2006/main" xmlns:r="http://schemas.openxmlformats.org/officeDocument/2006/relationships" xmlns:p="http://schemas.openxmlformats.org/presentationml/2006/main">
   <p:cSld>
     <p:spTree>
       <p:nvGrpSpPr>
@@ -9247,7 +9318,14 @@
         <p:cNvGrpSpPr/>
         <p:nvPr/>
       </p:nvGrpSpPr>
-      <p:grpSpPr/>
+      <p:grpSpPr>
+        <a:xfrm>
+          <a:off x="0" y="0"/>
+          <a:ext cx="0" cy="0"/>
+          <a:chOff x="0" y="0"/>
+          <a:chExt cx="0" cy="0"/>
+        </a:xfrm>
+      </p:grpSpPr>
       <p:sp>
         <p:nvSpPr>
           <p:cNvPr id="2" name="Rectangle 1"/>
@@ -9288,6 +9366,7 @@
           <a:lstStyle/>
           <a:p>
             <a:pPr algn="ctr"/>
+            <a:endParaRPr/>
           </a:p>
         </p:txBody>
       </p:sp>
@@ -9367,6 +9446,7 @@
           <a:lstStyle/>
           <a:p>
             <a:pPr algn="ctr"/>
+            <a:endParaRPr/>
           </a:p>
         </p:txBody>
       </p:sp>
@@ -9451,7 +9531,7 @@
           <p:nvPr/>
         </p:nvPicPr>
         <p:blipFill>
-          <a:blip r:embed="rId2"/>
+          <a:blip r:embed="rId3"/>
           <a:stretch>
             <a:fillRect/>
           </a:stretch>
@@ -9506,7 +9586,9 @@
         <p:txBody>
           <a:bodyPr rtlCol="0" anchor="ctr"/>
           <a:lstStyle/>
-          <a:p/>
+          <a:p>
+            <a:endParaRPr/>
+          </a:p>
         </p:txBody>
       </p:sp>
       <p:sp>
@@ -9621,7 +9703,9 @@
         <p:txBody>
           <a:bodyPr rtlCol="0" anchor="ctr"/>
           <a:lstStyle/>
-          <a:p/>
+          <a:p>
+            <a:endParaRPr/>
+          </a:p>
         </p:txBody>
       </p:sp>
       <p:sp>
@@ -9736,7 +9820,9 @@
         <p:txBody>
           <a:bodyPr rtlCol="0" anchor="ctr"/>
           <a:lstStyle/>
-          <a:p/>
+          <a:p>
+            <a:endParaRPr/>
+          </a:p>
         </p:txBody>
       </p:sp>
       <p:sp>
@@ -9851,7 +9937,9 @@
         <p:txBody>
           <a:bodyPr rtlCol="0" anchor="ctr"/>
           <a:lstStyle/>
-          <a:p/>
+          <a:p>
+            <a:endParaRPr/>
+          </a:p>
         </p:txBody>
       </p:sp>
       <p:sp>
@@ -9935,7 +10023,7 @@
 </file>
 
 <file path=ppt/slides/slide9.xml><?xml version="1.0" encoding="utf-8"?>
-<p:sld xmlns:a="http://schemas.openxmlformats.org/drawingml/2006/main" xmlns:p="http://schemas.openxmlformats.org/presentationml/2006/main" xmlns:r="http://schemas.openxmlformats.org/officeDocument/2006/relationships">
+<p:sld xmlns:a="http://schemas.openxmlformats.org/drawingml/2006/main" xmlns:r="http://schemas.openxmlformats.org/officeDocument/2006/relationships" xmlns:p="http://schemas.openxmlformats.org/presentationml/2006/main">
   <p:cSld>
     <p:spTree>
       <p:nvGrpSpPr>
@@ -9943,7 +10031,14 @@
         <p:cNvGrpSpPr/>
         <p:nvPr/>
       </p:nvGrpSpPr>
-      <p:grpSpPr/>
+      <p:grpSpPr>
+        <a:xfrm>
+          <a:off x="0" y="0"/>
+          <a:ext cx="0" cy="0"/>
+          <a:chOff x="0" y="0"/>
+          <a:chExt cx="0" cy="0"/>
+        </a:xfrm>
+      </p:grpSpPr>
       <p:sp>
         <p:nvSpPr>
           <p:cNvPr id="2" name="Rectangle 1"/>
@@ -9984,6 +10079,7 @@
           <a:lstStyle/>
           <a:p>
             <a:pPr algn="ctr"/>
+            <a:endParaRPr/>
           </a:p>
         </p:txBody>
       </p:sp>
@@ -10063,6 +10159,7 @@
           <a:lstStyle/>
           <a:p>
             <a:pPr algn="ctr"/>
+            <a:endParaRPr/>
           </a:p>
         </p:txBody>
       </p:sp>
@@ -10147,7 +10244,7 @@
           <p:nvPr/>
         </p:nvPicPr>
         <p:blipFill>
-          <a:blip r:embed="rId2"/>
+          <a:blip r:embed="rId3"/>
           <a:stretch>
             <a:fillRect/>
           </a:stretch>
@@ -10171,7 +10268,7 @@
           <p:nvPr/>
         </p:nvPicPr>
         <p:blipFill>
-          <a:blip r:embed="rId3"/>
+          <a:blip r:embed="rId4"/>
           <a:stretch>
             <a:fillRect/>
           </a:stretch>
@@ -10633,44 +10730,44 @@
         <a:sysClr val="window" lastClr="FFFFFF"/>
       </a:lt1>
       <a:dk2>
-        <a:srgbClr val="1F497D"/>
+        <a:srgbClr val="0E2841"/>
       </a:dk2>
       <a:lt2>
-        <a:srgbClr val="EEECE1"/>
+        <a:srgbClr val="E8E8E8"/>
       </a:lt2>
       <a:accent1>
-        <a:srgbClr val="4F81BD"/>
+        <a:srgbClr val="156082"/>
       </a:accent1>
       <a:accent2>
-        <a:srgbClr val="C0504D"/>
+        <a:srgbClr val="E97132"/>
       </a:accent2>
       <a:accent3>
-        <a:srgbClr val="9BBB59"/>
+        <a:srgbClr val="196B24"/>
       </a:accent3>
       <a:accent4>
-        <a:srgbClr val="8064A2"/>
+        <a:srgbClr val="0F9ED5"/>
       </a:accent4>
       <a:accent5>
-        <a:srgbClr val="4BACC6"/>
+        <a:srgbClr val="A02B93"/>
       </a:accent5>
       <a:accent6>
-        <a:srgbClr val="F79646"/>
+        <a:srgbClr val="4EA72E"/>
       </a:accent6>
       <a:hlink>
-        <a:srgbClr val="0000FF"/>
+        <a:srgbClr val="467886"/>
       </a:hlink>
       <a:folHlink>
-        <a:srgbClr val="800080"/>
+        <a:srgbClr val="96607D"/>
       </a:folHlink>
     </a:clrScheme>
     <a:fontScheme name="Office">
       <a:majorFont>
-        <a:latin typeface="Calibri"/>
+        <a:latin typeface="Aptos Display" panose="02110004020202020204"/>
         <a:ea typeface=""/>
         <a:cs typeface=""/>
-        <a:font script="Jpan" typeface="ＭＳ Ｐゴシック"/>
+        <a:font script="Jpan" typeface="游ゴシック Light"/>
         <a:font script="Hang" typeface="맑은 고딕"/>
-        <a:font script="Hans" typeface="宋体"/>
+        <a:font script="Hans" typeface="等线 Light"/>
         <a:font script="Hant" typeface="新細明體"/>
         <a:font script="Arab" typeface="Times New Roman"/>
         <a:font script="Hebr" typeface="Times New Roman"/>
@@ -10698,14 +10795,31 @@
         <a:font script="Viet" typeface="Times New Roman"/>
         <a:font script="Uigh" typeface="Microsoft Uighur"/>
         <a:font script="Geor" typeface="Sylfaen"/>
+        <a:font script="Armn" typeface="Arial"/>
+        <a:font script="Bugi" typeface="Leelawadee UI"/>
+        <a:font script="Bopo" typeface="Microsoft JhengHei"/>
+        <a:font script="Java" typeface="Javanese Text"/>
+        <a:font script="Lisu" typeface="Segoe UI"/>
+        <a:font script="Mymr" typeface="Myanmar Text"/>
+        <a:font script="Nkoo" typeface="Ebrima"/>
+        <a:font script="Olck" typeface="Nirmala UI"/>
+        <a:font script="Osma" typeface="Ebrima"/>
+        <a:font script="Phag" typeface="Phagspa"/>
+        <a:font script="Syrn" typeface="Estrangelo Edessa"/>
+        <a:font script="Syrj" typeface="Estrangelo Edessa"/>
+        <a:font script="Syre" typeface="Estrangelo Edessa"/>
+        <a:font script="Sora" typeface="Nirmala UI"/>
+        <a:font script="Tale" typeface="Microsoft Tai Le"/>
+        <a:font script="Talu" typeface="Microsoft New Tai Lue"/>
+        <a:font script="Tfng" typeface="Ebrima"/>
       </a:majorFont>
       <a:minorFont>
-        <a:latin typeface="Calibri"/>
+        <a:latin typeface="Aptos" panose="02110004020202020204"/>
         <a:ea typeface=""/>
         <a:cs typeface=""/>
-        <a:font script="Jpan" typeface="ＭＳ Ｐゴシック"/>
+        <a:font script="Jpan" typeface="游ゴシック"/>
         <a:font script="Hang" typeface="맑은 고딕"/>
-        <a:font script="Hans" typeface="宋体"/>
+        <a:font script="Hans" typeface="等线"/>
         <a:font script="Hant" typeface="新細明體"/>
         <a:font script="Arab" typeface="Arial"/>
         <a:font script="Hebr" typeface="Arial"/>
@@ -10733,6 +10847,23 @@
         <a:font script="Viet" typeface="Arial"/>
         <a:font script="Uigh" typeface="Microsoft Uighur"/>
         <a:font script="Geor" typeface="Sylfaen"/>
+        <a:font script="Armn" typeface="Arial"/>
+        <a:font script="Bugi" typeface="Leelawadee UI"/>
+        <a:font script="Bopo" typeface="Microsoft JhengHei"/>
+        <a:font script="Java" typeface="Javanese Text"/>
+        <a:font script="Lisu" typeface="Segoe UI"/>
+        <a:font script="Mymr" typeface="Myanmar Text"/>
+        <a:font script="Nkoo" typeface="Ebrima"/>
+        <a:font script="Olck" typeface="Nirmala UI"/>
+        <a:font script="Osma" typeface="Ebrima"/>
+        <a:font script="Phag" typeface="Phagspa"/>
+        <a:font script="Syrn" typeface="Estrangelo Edessa"/>
+        <a:font script="Syrj" typeface="Estrangelo Edessa"/>
+        <a:font script="Syre" typeface="Estrangelo Edessa"/>
+        <a:font script="Sora" typeface="Nirmala UI"/>
+        <a:font script="Tale" typeface="Microsoft Tai Le"/>
+        <a:font script="Talu" typeface="Microsoft New Tai Lue"/>
+        <a:font script="Tfng" typeface="Ebrima"/>
       </a:minorFont>
     </a:fontScheme>
     <a:fmtScheme name="Office">
@@ -10744,180 +10875,136 @@
           <a:gsLst>
             <a:gs pos="0">
               <a:schemeClr val="phClr">
-                <a:tint val="50000"/>
-                <a:satMod val="300000"/>
+                <a:lumMod val="110000"/>
+                <a:satMod val="105000"/>
+                <a:tint val="67000"/>
               </a:schemeClr>
             </a:gs>
-            <a:gs pos="35000">
+            <a:gs pos="50000">
               <a:schemeClr val="phClr">
-                <a:tint val="37000"/>
-                <a:satMod val="300000"/>
+                <a:lumMod val="105000"/>
+                <a:satMod val="103000"/>
+                <a:tint val="73000"/>
               </a:schemeClr>
             </a:gs>
             <a:gs pos="100000">
               <a:schemeClr val="phClr">
-                <a:tint val="15000"/>
-                <a:satMod val="350000"/>
+                <a:lumMod val="105000"/>
+                <a:satMod val="109000"/>
+                <a:tint val="81000"/>
               </a:schemeClr>
             </a:gs>
           </a:gsLst>
-          <a:lin ang="16200000" scaled="1"/>
+          <a:lin ang="5400000" scaled="0"/>
         </a:gradFill>
         <a:gradFill rotWithShape="1">
           <a:gsLst>
             <a:gs pos="0">
               <a:schemeClr val="phClr">
-                <a:tint val="100000"/>
+                <a:satMod val="103000"/>
+                <a:lumMod val="102000"/>
+                <a:tint val="94000"/>
+              </a:schemeClr>
+            </a:gs>
+            <a:gs pos="50000">
+              <a:schemeClr val="phClr">
+                <a:satMod val="110000"/>
+                <a:lumMod val="100000"/>
                 <a:shade val="100000"/>
-                <a:satMod val="130000"/>
               </a:schemeClr>
             </a:gs>
             <a:gs pos="100000">
               <a:schemeClr val="phClr">
-                <a:tint val="50000"/>
-                <a:shade val="100000"/>
-                <a:satMod val="350000"/>
+                <a:lumMod val="99000"/>
+                <a:satMod val="120000"/>
+                <a:shade val="78000"/>
               </a:schemeClr>
             </a:gs>
           </a:gsLst>
-          <a:lin ang="16200000" scaled="0"/>
+          <a:lin ang="5400000" scaled="0"/>
         </a:gradFill>
       </a:fillStyleLst>
       <a:lnStyleLst>
-        <a:ln w="9525" cap="flat" cmpd="sng" algn="ctr">
+        <a:ln w="12700" cap="flat" cmpd="sng" algn="ctr">
           <a:solidFill>
-            <a:schemeClr val="phClr">
-              <a:shade val="95000"/>
-              <a:satMod val="105000"/>
-            </a:schemeClr>
+            <a:schemeClr val="phClr"/>
           </a:solidFill>
           <a:prstDash val="solid"/>
+          <a:miter lim="800000"/>
+        </a:ln>
+        <a:ln w="19050" cap="flat" cmpd="sng" algn="ctr">
+          <a:solidFill>
+            <a:schemeClr val="phClr"/>
+          </a:solidFill>
+          <a:prstDash val="solid"/>
+          <a:miter lim="800000"/>
         </a:ln>
         <a:ln w="25400" cap="flat" cmpd="sng" algn="ctr">
           <a:solidFill>
             <a:schemeClr val="phClr"/>
           </a:solidFill>
           <a:prstDash val="solid"/>
-        </a:ln>
-        <a:ln w="38100" cap="flat" cmpd="sng" algn="ctr">
-          <a:solidFill>
-            <a:schemeClr val="phClr"/>
-          </a:solidFill>
-          <a:prstDash val="solid"/>
+          <a:miter lim="800000"/>
         </a:ln>
       </a:lnStyleLst>
       <a:effectStyleLst>
         <a:effectStyle>
+          <a:effectLst/>
+        </a:effectStyle>
+        <a:effectStyle>
+          <a:effectLst/>
+        </a:effectStyle>
+        <a:effectStyle>
           <a:effectLst>
-            <a:outerShdw blurRad="40000" dist="20000" dir="5400000" rotWithShape="0">
+            <a:outerShdw blurRad="57150" dist="19050" dir="5400000" algn="ctr" rotWithShape="0">
               <a:srgbClr val="000000">
-                <a:alpha val="38000"/>
+                <a:alpha val="63000"/>
               </a:srgbClr>
             </a:outerShdw>
           </a:effectLst>
-        </a:effectStyle>
-        <a:effectStyle>
-          <a:effectLst>
-            <a:outerShdw blurRad="40000" dist="23000" dir="5400000" rotWithShape="0">
-              <a:srgbClr val="000000">
-                <a:alpha val="35000"/>
-              </a:srgbClr>
-            </a:outerShdw>
-          </a:effectLst>
-        </a:effectStyle>
-        <a:effectStyle>
-          <a:effectLst>
-            <a:outerShdw blurRad="40000" dist="23000" dir="5400000" rotWithShape="0">
-              <a:srgbClr val="000000">
-                <a:alpha val="35000"/>
-              </a:srgbClr>
-            </a:outerShdw>
-          </a:effectLst>
-          <a:scene3d>
-            <a:camera prst="orthographicFront">
-              <a:rot lat="0" lon="0" rev="0"/>
-            </a:camera>
-            <a:lightRig rig="threePt" dir="t">
-              <a:rot lat="0" lon="0" rev="1200000"/>
-            </a:lightRig>
-          </a:scene3d>
-          <a:sp3d>
-            <a:bevelT w="63500" h="25400"/>
-          </a:sp3d>
         </a:effectStyle>
       </a:effectStyleLst>
       <a:bgFillStyleLst>
         <a:solidFill>
           <a:schemeClr val="phClr"/>
         </a:solidFill>
+        <a:solidFill>
+          <a:schemeClr val="phClr">
+            <a:tint val="95000"/>
+            <a:satMod val="170000"/>
+          </a:schemeClr>
+        </a:solidFill>
         <a:gradFill rotWithShape="1">
           <a:gsLst>
             <a:gs pos="0">
               <a:schemeClr val="phClr">
-                <a:tint val="40000"/>
-                <a:satMod val="350000"/>
+                <a:tint val="93000"/>
+                <a:satMod val="150000"/>
+                <a:shade val="98000"/>
+                <a:lumMod val="102000"/>
               </a:schemeClr>
             </a:gs>
-            <a:gs pos="40000">
+            <a:gs pos="50000">
               <a:schemeClr val="phClr">
-                <a:tint val="45000"/>
-                <a:shade val="99000"/>
-                <a:satMod val="350000"/>
+                <a:tint val="98000"/>
+                <a:satMod val="130000"/>
+                <a:shade val="90000"/>
+                <a:lumMod val="103000"/>
               </a:schemeClr>
             </a:gs>
             <a:gs pos="100000">
               <a:schemeClr val="phClr">
-                <a:shade val="20000"/>
-                <a:satMod val="255000"/>
+                <a:shade val="63000"/>
+                <a:satMod val="120000"/>
               </a:schemeClr>
             </a:gs>
           </a:gsLst>
-          <a:path path="circle">
-            <a:fillToRect l="50000" t="-80000" r="50000" b="180000"/>
-          </a:path>
-        </a:gradFill>
-        <a:gradFill rotWithShape="1">
-          <a:gsLst>
-            <a:gs pos="0">
-              <a:schemeClr val="phClr">
-                <a:tint val="80000"/>
-                <a:satMod val="300000"/>
-              </a:schemeClr>
-            </a:gs>
-            <a:gs pos="100000">
-              <a:schemeClr val="phClr">
-                <a:shade val="30000"/>
-                <a:satMod val="200000"/>
-              </a:schemeClr>
-            </a:gs>
-          </a:gsLst>
-          <a:path path="circle">
-            <a:fillToRect l="50000" t="50000" r="50000" b="50000"/>
-          </a:path>
+          <a:lin ang="5400000" scaled="0"/>
         </a:gradFill>
       </a:bgFillStyleLst>
     </a:fmtScheme>
   </a:themeElements>
   <a:objectDefaults>
-    <a:spDef>
-      <a:spPr/>
-      <a:bodyPr/>
-      <a:lstStyle/>
-      <a:style>
-        <a:lnRef idx="1">
-          <a:schemeClr val="accent1"/>
-        </a:lnRef>
-        <a:fillRef idx="3">
-          <a:schemeClr val="accent1"/>
-        </a:fillRef>
-        <a:effectRef idx="2">
-          <a:schemeClr val="accent1"/>
-        </a:effectRef>
-        <a:fontRef idx="minor">
-          <a:schemeClr val="lt1"/>
-        </a:fontRef>
-      </a:style>
-    </a:spDef>
     <a:lnDef>
       <a:spPr/>
       <a:bodyPr/>
@@ -10939,5 +11026,10 @@
     </a:lnDef>
   </a:objectDefaults>
   <a:extraClrSchemeLst/>
+  <a:extLst>
+    <a:ext uri="{05A4C25C-085E-4340-85A3-A5531E510DB2}">
+      <thm15:themeFamily xmlns:thm15="http://schemas.microsoft.com/office/thememl/2012/main" name="Office Theme" id="{2E142A2C-CD16-42D6-873A-C26D2A0506FA}" vid="{1BDDFF52-6CD6-40A5-AB3C-68EB2F1E4D0A}"/>
+    </a:ext>
+  </a:extLst>
 </a:theme>
 </file>